--- a/Marketing/Decks/VL-VLC-Tech-Promo-EN.pptx
+++ b/Marketing/Decks/VL-VLC-Tech-Promo-EN.pptx
@@ -21,9 +21,10 @@
     <p:sldId id="269" r:id="rId15"/>
     <p:sldId id="270" r:id="rId16"/>
     <p:sldId id="271" r:id="rId17"/>
+    <p:sldId id="272" r:id="rId18"/>
   </p:sldIdLst>
   <p:notesMasterIdLst>
-    <p:notesMasterId r:id="rId18"/>
+    <p:notesMasterId r:id="rId19"/>
   </p:notesMasterIdLst>
   <p:sldSz cx="12191695" cy="6858000"/>
   <p:notesSz cx="6858000" cy="12191695"/>
@@ -1157,6 +1158,94 @@
             <a:fld id="{F7021451-1387-4CA6-816F-3879F97B5CBC}" type="slidenum">
               <a:rPr lang="en-US"/>
               <a:t>16</a:t>
+            </a:fld>
+            <a:endParaRPr lang="en-US"/>
+          </a:p>
+        </p:txBody>
+      </p:sp>
+    </p:spTree>
+    <p:extLst>
+      <p:ext uri="{BB962C8B-B14F-4D97-AF65-F5344CB8AC3E}">
+        <p14:creationId xmlns:p14="http://schemas.microsoft.com/office/powerpoint/2010/main" val="1024086991"/>
+      </p:ext>
+    </p:extLst>
+  </p:cSld>
+  <p:clrMapOvr>
+    <a:masterClrMapping/>
+  </p:clrMapOvr>
+</p:notes>
+</file>
+
+<file path=ppt/notesSlides/notesSlide17.xml><?xml version="1.0" encoding="utf-8"?>
+<p:notes xmlns:a="http://schemas.openxmlformats.org/drawingml/2006/main" xmlns:r="http://schemas.openxmlformats.org/officeDocument/2006/relationships" xmlns:p="http://schemas.openxmlformats.org/presentationml/2006/main">
+  <p:cSld>
+    <p:spTree>
+      <p:nvGrpSpPr>
+        <p:cNvPr id="1" name=""/>
+        <p:cNvGrpSpPr/>
+        <p:nvPr/>
+      </p:nvGrpSpPr>
+      <p:grpSpPr>
+        <a:xfrm>
+          <a:off x="0" y="0"/>
+          <a:ext cx="0" cy="0"/>
+          <a:chOff x="0" y="0"/>
+          <a:chExt cx="0" cy="0"/>
+        </a:xfrm>
+      </p:grpSpPr>
+      <p:sp>
+        <p:nvSpPr>
+          <p:cNvPr id="2" name="Slide Image Placeholder 1"/>
+          <p:cNvSpPr>
+            <a:spLocks noGrp="1" noRot="1" noChangeAspect="1"/>
+          </p:cNvSpPr>
+          <p:nvPr>
+            <p:ph type="sldImg"/>
+          </p:nvPr>
+        </p:nvSpPr>
+        <p:spPr/>
+      </p:sp>
+      <p:sp>
+        <p:nvSpPr>
+          <p:cNvPr id="3" name="Notes Placeholder 2"/>
+          <p:cNvSpPr>
+            <a:spLocks noGrp="1"/>
+          </p:cNvSpPr>
+          <p:nvPr>
+            <p:ph type="body" idx="1"/>
+          </p:nvPr>
+        </p:nvSpPr>
+        <p:spPr/>
+        <p:txBody>
+          <a:bodyPr/>
+          <a:lstStyle/>
+          <a:p>
+            <a:r>
+              <a:rPr lang="en-US" dirty="0"/>
+              <a:t/>
+            </a:r>
+            <a:endParaRPr lang="en-US" dirty="0"/>
+          </a:p>
+        </p:txBody>
+      </p:sp>
+      <p:sp>
+        <p:nvSpPr>
+          <p:cNvPr id="4" name="Slide Number Placeholder 3"/>
+          <p:cNvSpPr>
+            <a:spLocks noGrp="1"/>
+          </p:cNvSpPr>
+          <p:nvPr>
+            <p:ph type="sldNum" sz="quarter" idx="10"/>
+          </p:nvPr>
+        </p:nvSpPr>
+        <p:spPr/>
+        <p:txBody>
+          <a:bodyPr/>
+          <a:lstStyle/>
+          <a:p>
+            <a:fld id="{F7021451-1387-4CA6-816F-3879F97B5CBC}" type="slidenum">
+              <a:rPr lang="en-US"/>
+              <a:t>17</a:t>
             </a:fld>
             <a:endParaRPr lang="en-US"/>
           </a:p>
@@ -3239,7 +3328,7 @@
                 <a:ea typeface="Helvetica Neue" pitchFamily="34" charset="-122"/>
                 <a:cs typeface="Helvetica Neue" pitchFamily="34" charset="-120"/>
               </a:rPr>
-              <a:t>ASSEMBLY WORKFLOW</a:t>
+              <a:t>DAG HARNESS</a:t>
             </a:r>
             <a:endParaRPr lang="en-US" sz="850" dirty="0"/>
           </a:p>
@@ -3253,8 +3342,8 @@
         </p:nvSpPr>
         <p:spPr>
           <a:xfrm>
-            <a:off x="585216" y="1124712"/>
-            <a:ext cx="5852160" cy="1051560"/>
+            <a:off x="585216" y="1078992"/>
+            <a:ext cx="6492240" cy="1051560"/>
           </a:xfrm>
           <a:prstGeom prst="rect">
             <a:avLst/>
@@ -3272,7 +3361,7 @@
               <a:buNone/>
             </a:pPr>
             <a:r>
-              <a:rPr lang="en-US" sz="3100" b="1" dirty="0">
+              <a:rPr lang="en-US" sz="2700" b="1" dirty="0">
                 <a:solidFill>
                   <a:srgbClr val="0B1628"/>
                 </a:solidFill>
@@ -3280,9 +3369,9 @@
                 <a:ea typeface="Helvetica Neue" pitchFamily="34" charset="-122"/>
                 <a:cs typeface="Helvetica Neue" pitchFamily="34" charset="-120"/>
               </a:rPr>
-              <a:t>Components can be searched and assembled inside the DAG.</a:t>
-            </a:r>
-            <a:endParaRPr lang="en-US" sz="3100" dirty="0"/>
+              <a:t>Point AI creates output. A DAG harness creates progress.</a:t>
+            </a:r>
+            <a:endParaRPr lang="en-US" sz="2700" dirty="0"/>
           </a:p>
         </p:txBody>
       </p:sp>
@@ -3294,8 +3383,8 @@
         </p:nvSpPr>
         <p:spPr>
           <a:xfrm>
-            <a:off x="585216" y="2542032"/>
-            <a:ext cx="4937760" cy="1188720"/>
+            <a:off x="585216" y="2148840"/>
+            <a:ext cx="5257800" cy="1188720"/>
           </a:xfrm>
           <a:prstGeom prst="rect">
             <a:avLst/>
@@ -3321,7 +3410,7 @@
                 <a:ea typeface="Helvetica Neue" pitchFamily="34" charset="-122"/>
                 <a:cs typeface="Helvetica Neue" pitchFamily="34" charset="-120"/>
               </a:rPr>
-              <a:t>A workflow node searches the factory, AI confirms fit, selected components are installed, dependencies close, and the final VL app is linted and compiled.</a:t>
+              <a:t>A single AI node can absorb many inputs and produce a powerful result. But a complex system is never finished in one step; next steps, validation and repair must be structured.</a:t>
             </a:r>
             <a:endParaRPr lang="en-US" sz="1220" dirty="0"/>
           </a:p>
@@ -3335,12 +3424,12 @@
         </p:nvSpPr>
         <p:spPr>
           <a:xfrm>
-            <a:off x="6400800" y="1463040"/>
-            <a:ext cx="5166360" cy="3353889"/>
+            <a:off x="585216" y="3337560"/>
+            <a:ext cx="4800600" cy="2084832"/>
           </a:xfrm>
           <a:prstGeom prst="roundRect">
             <a:avLst>
-              <a:gd name="adj" fmla="val 1636"/>
+              <a:gd name="adj" fmla="val 2632"/>
             </a:avLst>
           </a:prstGeom>
           <a:solidFill>
@@ -3354,45 +3443,64 @@
           </a:ln>
         </p:spPr>
       </p:sp>
-      <p:pic>
-        <p:nvPicPr>
-          <p:cNvPr id="8" name="Image 0" descr="/Users/ivx/Documents/VLC-Marketing/brief/assets/vlc-flow-mode-2026-04-14.png">    </p:cNvPr>
-          <p:cNvPicPr>
-            <a:picLocks noChangeAspect="1"/>
-          </p:cNvPicPr>
-          <p:nvPr/>
-        </p:nvPicPr>
-        <p:blipFill>
-          <a:blip r:embed="rId1"/>
-          <a:stretch>
-            <a:fillRect/>
-          </a:stretch>
-        </p:blipFill>
-        <p:spPr>
-          <a:xfrm>
-            <a:off x="6446520" y="1508760"/>
-            <a:ext cx="5074920" cy="3262449"/>
-          </a:xfrm>
-          <a:prstGeom prst="rect">
-            <a:avLst/>
-          </a:prstGeom>
-        </p:spPr>
-      </p:pic>
-      <p:sp>
-        <p:nvSpPr>
-          <p:cNvPr id="9" name="Shape 6"/>
-          <p:cNvSpPr/>
-          <p:nvPr/>
-        </p:nvSpPr>
-        <p:spPr>
-          <a:xfrm>
-            <a:off x="585216" y="6327648"/>
-            <a:ext cx="11021263" cy="0"/>
-          </a:xfrm>
-          <a:prstGeom prst="line">
-            <a:avLst/>
-          </a:prstGeom>
-          <a:noFill/>
+      <p:sp>
+        <p:nvSpPr>
+          <p:cNvPr id="8" name="Text 6"/>
+          <p:cNvSpPr/>
+          <p:nvPr/>
+        </p:nvSpPr>
+        <p:spPr>
+          <a:xfrm>
+            <a:off x="804672" y="3538728"/>
+            <a:ext cx="1828800" cy="146304"/>
+          </a:xfrm>
+          <a:prstGeom prst="rect">
+            <a:avLst/>
+          </a:prstGeom>
+          <a:noFill/>
+          <a:ln/>
+        </p:spPr>
+        <p:txBody>
+          <a:bodyPr wrap="square" lIns="0" tIns="0" rIns="0" bIns="0" rtlCol="0" anchor="ctr"/>
+          <a:lstStyle/>
+          <a:p>
+            <a:pPr indent="0" marL="0">
+              <a:buNone/>
+            </a:pPr>
+            <a:r>
+              <a:rPr lang="en-US" sz="1100" b="1" dirty="0">
+                <a:solidFill>
+                  <a:srgbClr val="0B1628"/>
+                </a:solidFill>
+                <a:latin typeface="Helvetica Neue" pitchFamily="34" charset="0"/>
+                <a:ea typeface="Helvetica Neue" pitchFamily="34" charset="-122"/>
+                <a:cs typeface="Helvetica Neue" pitchFamily="34" charset="-120"/>
+              </a:rPr>
+              <a:t>Single AI node</a:t>
+            </a:r>
+            <a:endParaRPr lang="en-US" sz="1100" dirty="0"/>
+          </a:p>
+        </p:txBody>
+      </p:sp>
+      <p:sp>
+        <p:nvSpPr>
+          <p:cNvPr id="9" name="Shape 7"/>
+          <p:cNvSpPr/>
+          <p:nvPr/>
+        </p:nvSpPr>
+        <p:spPr>
+          <a:xfrm>
+            <a:off x="841248" y="3995928"/>
+            <a:ext cx="822960" cy="210312"/>
+          </a:xfrm>
+          <a:prstGeom prst="roundRect">
+            <a:avLst>
+              <a:gd name="adj" fmla="val 26087"/>
+            </a:avLst>
+          </a:prstGeom>
+          <a:solidFill>
+            <a:srgbClr val="EEF4F8"/>
+          </a:solidFill>
           <a:ln w="12700">
             <a:solidFill>
               <a:srgbClr val="DCE6EE"/>
@@ -3403,7 +3511,1451 @@
       </p:sp>
       <p:sp>
         <p:nvSpPr>
-          <p:cNvPr id="10" name="Text 7"/>
+          <p:cNvPr id="10" name="Text 8"/>
+          <p:cNvSpPr/>
+          <p:nvPr/>
+        </p:nvSpPr>
+        <p:spPr>
+          <a:xfrm>
+            <a:off x="841248" y="4064508"/>
+            <a:ext cx="822960" cy="54864"/>
+          </a:xfrm>
+          <a:prstGeom prst="rect">
+            <a:avLst/>
+          </a:prstGeom>
+          <a:noFill/>
+          <a:ln/>
+        </p:spPr>
+        <p:txBody>
+          <a:bodyPr wrap="square" lIns="0" tIns="0" rIns="0" bIns="0" rtlCol="0" anchor="ctr"/>
+          <a:lstStyle/>
+          <a:p>
+            <a:pPr algn="ctr" indent="0" marL="0">
+              <a:buNone/>
+            </a:pPr>
+            <a:r>
+              <a:rPr lang="en-US" sz="620" b="1" dirty="0">
+                <a:solidFill>
+                  <a:srgbClr val="263A52"/>
+                </a:solidFill>
+                <a:latin typeface="Helvetica Neue" pitchFamily="34" charset="0"/>
+                <a:ea typeface="Helvetica Neue" pitchFamily="34" charset="-122"/>
+                <a:cs typeface="Helvetica Neue" pitchFamily="34" charset="-120"/>
+              </a:rPr>
+              <a:t>Prompt</a:t>
+            </a:r>
+            <a:endParaRPr lang="en-US" sz="620" dirty="0"/>
+          </a:p>
+        </p:txBody>
+      </p:sp>
+      <p:sp>
+        <p:nvSpPr>
+          <p:cNvPr id="11" name="Shape 9"/>
+          <p:cNvSpPr/>
+          <p:nvPr/>
+        </p:nvSpPr>
+        <p:spPr>
+          <a:xfrm>
+            <a:off x="1700784" y="4096512"/>
+            <a:ext cx="932688" cy="512064"/>
+          </a:xfrm>
+          <a:prstGeom prst="line">
+            <a:avLst/>
+          </a:prstGeom>
+          <a:noFill/>
+          <a:ln w="12700">
+            <a:solidFill>
+              <a:srgbClr val="DCE6EE"/>
+            </a:solidFill>
+            <a:prstDash val="solid"/>
+            <a:tailEnd type="triangle"/>
+          </a:ln>
+        </p:spPr>
+      </p:sp>
+      <p:sp>
+        <p:nvSpPr>
+          <p:cNvPr id="12" name="Shape 10"/>
+          <p:cNvSpPr/>
+          <p:nvPr/>
+        </p:nvSpPr>
+        <p:spPr>
+          <a:xfrm>
+            <a:off x="841248" y="4306824"/>
+            <a:ext cx="822960" cy="210312"/>
+          </a:xfrm>
+          <a:prstGeom prst="roundRect">
+            <a:avLst>
+              <a:gd name="adj" fmla="val 26087"/>
+            </a:avLst>
+          </a:prstGeom>
+          <a:solidFill>
+            <a:srgbClr val="EEF4F8"/>
+          </a:solidFill>
+          <a:ln w="12700">
+            <a:solidFill>
+              <a:srgbClr val="DCE6EE"/>
+            </a:solidFill>
+            <a:prstDash val="solid"/>
+          </a:ln>
+        </p:spPr>
+      </p:sp>
+      <p:sp>
+        <p:nvSpPr>
+          <p:cNvPr id="13" name="Text 11"/>
+          <p:cNvSpPr/>
+          <p:nvPr/>
+        </p:nvSpPr>
+        <p:spPr>
+          <a:xfrm>
+            <a:off x="841248" y="4375404"/>
+            <a:ext cx="822960" cy="54864"/>
+          </a:xfrm>
+          <a:prstGeom prst="rect">
+            <a:avLst/>
+          </a:prstGeom>
+          <a:noFill/>
+          <a:ln/>
+        </p:spPr>
+        <p:txBody>
+          <a:bodyPr wrap="square" lIns="0" tIns="0" rIns="0" bIns="0" rtlCol="0" anchor="ctr"/>
+          <a:lstStyle/>
+          <a:p>
+            <a:pPr algn="ctr" indent="0" marL="0">
+              <a:buNone/>
+            </a:pPr>
+            <a:r>
+              <a:rPr lang="en-US" sz="620" b="1" dirty="0">
+                <a:solidFill>
+                  <a:srgbClr val="263A52"/>
+                </a:solidFill>
+                <a:latin typeface="Helvetica Neue" pitchFamily="34" charset="0"/>
+                <a:ea typeface="Helvetica Neue" pitchFamily="34" charset="-122"/>
+                <a:cs typeface="Helvetica Neue" pitchFamily="34" charset="-120"/>
+              </a:rPr>
+              <a:t>Docs</a:t>
+            </a:r>
+            <a:endParaRPr lang="en-US" sz="620" dirty="0"/>
+          </a:p>
+        </p:txBody>
+      </p:sp>
+      <p:sp>
+        <p:nvSpPr>
+          <p:cNvPr id="14" name="Shape 12"/>
+          <p:cNvSpPr/>
+          <p:nvPr/>
+        </p:nvSpPr>
+        <p:spPr>
+          <a:xfrm>
+            <a:off x="1700784" y="4407408"/>
+            <a:ext cx="932688" cy="365760"/>
+          </a:xfrm>
+          <a:prstGeom prst="line">
+            <a:avLst/>
+          </a:prstGeom>
+          <a:noFill/>
+          <a:ln w="12700">
+            <a:solidFill>
+              <a:srgbClr val="DCE6EE"/>
+            </a:solidFill>
+            <a:prstDash val="solid"/>
+            <a:tailEnd type="triangle"/>
+          </a:ln>
+        </p:spPr>
+      </p:sp>
+      <p:sp>
+        <p:nvSpPr>
+          <p:cNvPr id="15" name="Shape 13"/>
+          <p:cNvSpPr/>
+          <p:nvPr/>
+        </p:nvSpPr>
+        <p:spPr>
+          <a:xfrm>
+            <a:off x="841248" y="4617720"/>
+            <a:ext cx="822960" cy="210312"/>
+          </a:xfrm>
+          <a:prstGeom prst="roundRect">
+            <a:avLst>
+              <a:gd name="adj" fmla="val 26087"/>
+            </a:avLst>
+          </a:prstGeom>
+          <a:solidFill>
+            <a:srgbClr val="EEF4F8"/>
+          </a:solidFill>
+          <a:ln w="12700">
+            <a:solidFill>
+              <a:srgbClr val="DCE6EE"/>
+            </a:solidFill>
+            <a:prstDash val="solid"/>
+          </a:ln>
+        </p:spPr>
+      </p:sp>
+      <p:sp>
+        <p:nvSpPr>
+          <p:cNvPr id="16" name="Text 14"/>
+          <p:cNvSpPr/>
+          <p:nvPr/>
+        </p:nvSpPr>
+        <p:spPr>
+          <a:xfrm>
+            <a:off x="841248" y="4686300"/>
+            <a:ext cx="822960" cy="54864"/>
+          </a:xfrm>
+          <a:prstGeom prst="rect">
+            <a:avLst/>
+          </a:prstGeom>
+          <a:noFill/>
+          <a:ln/>
+        </p:spPr>
+        <p:txBody>
+          <a:bodyPr wrap="square" lIns="0" tIns="0" rIns="0" bIns="0" rtlCol="0" anchor="ctr"/>
+          <a:lstStyle/>
+          <a:p>
+            <a:pPr algn="ctr" indent="0" marL="0">
+              <a:buNone/>
+            </a:pPr>
+            <a:r>
+              <a:rPr lang="en-US" sz="620" b="1" dirty="0">
+                <a:solidFill>
+                  <a:srgbClr val="263A52"/>
+                </a:solidFill>
+                <a:latin typeface="Helvetica Neue" pitchFamily="34" charset="0"/>
+                <a:ea typeface="Helvetica Neue" pitchFamily="34" charset="-122"/>
+                <a:cs typeface="Helvetica Neue" pitchFamily="34" charset="-120"/>
+              </a:rPr>
+              <a:t>Code</a:t>
+            </a:r>
+            <a:endParaRPr lang="en-US" sz="620" dirty="0"/>
+          </a:p>
+        </p:txBody>
+      </p:sp>
+      <p:sp>
+        <p:nvSpPr>
+          <p:cNvPr id="17" name="Shape 15"/>
+          <p:cNvSpPr/>
+          <p:nvPr/>
+        </p:nvSpPr>
+        <p:spPr>
+          <a:xfrm>
+            <a:off x="1700784" y="4718304"/>
+            <a:ext cx="932688" cy="219456"/>
+          </a:xfrm>
+          <a:prstGeom prst="line">
+            <a:avLst/>
+          </a:prstGeom>
+          <a:noFill/>
+          <a:ln w="12700">
+            <a:solidFill>
+              <a:srgbClr val="DCE6EE"/>
+            </a:solidFill>
+            <a:prstDash val="solid"/>
+            <a:tailEnd type="triangle"/>
+          </a:ln>
+        </p:spPr>
+      </p:sp>
+      <p:sp>
+        <p:nvSpPr>
+          <p:cNvPr id="18" name="Shape 16"/>
+          <p:cNvSpPr/>
+          <p:nvPr/>
+        </p:nvSpPr>
+        <p:spPr>
+          <a:xfrm>
+            <a:off x="841248" y="4928616"/>
+            <a:ext cx="822960" cy="210312"/>
+          </a:xfrm>
+          <a:prstGeom prst="roundRect">
+            <a:avLst>
+              <a:gd name="adj" fmla="val 26087"/>
+            </a:avLst>
+          </a:prstGeom>
+          <a:solidFill>
+            <a:srgbClr val="EEF4F8"/>
+          </a:solidFill>
+          <a:ln w="12700">
+            <a:solidFill>
+              <a:srgbClr val="DCE6EE"/>
+            </a:solidFill>
+            <a:prstDash val="solid"/>
+          </a:ln>
+        </p:spPr>
+      </p:sp>
+      <p:sp>
+        <p:nvSpPr>
+          <p:cNvPr id="19" name="Text 17"/>
+          <p:cNvSpPr/>
+          <p:nvPr/>
+        </p:nvSpPr>
+        <p:spPr>
+          <a:xfrm>
+            <a:off x="841248" y="4997196"/>
+            <a:ext cx="822960" cy="54864"/>
+          </a:xfrm>
+          <a:prstGeom prst="rect">
+            <a:avLst/>
+          </a:prstGeom>
+          <a:noFill/>
+          <a:ln/>
+        </p:spPr>
+        <p:txBody>
+          <a:bodyPr wrap="square" lIns="0" tIns="0" rIns="0" bIns="0" rtlCol="0" anchor="ctr"/>
+          <a:lstStyle/>
+          <a:p>
+            <a:pPr algn="ctr" indent="0" marL="0">
+              <a:buNone/>
+            </a:pPr>
+            <a:r>
+              <a:rPr lang="en-US" sz="620" b="1" dirty="0">
+                <a:solidFill>
+                  <a:srgbClr val="263A52"/>
+                </a:solidFill>
+                <a:latin typeface="Helvetica Neue" pitchFamily="34" charset="0"/>
+                <a:ea typeface="Helvetica Neue" pitchFamily="34" charset="-122"/>
+                <a:cs typeface="Helvetica Neue" pitchFamily="34" charset="-120"/>
+              </a:rPr>
+              <a:t>Data</a:t>
+            </a:r>
+            <a:endParaRPr lang="en-US" sz="620" dirty="0"/>
+          </a:p>
+        </p:txBody>
+      </p:sp>
+      <p:sp>
+        <p:nvSpPr>
+          <p:cNvPr id="20" name="Shape 18"/>
+          <p:cNvSpPr/>
+          <p:nvPr/>
+        </p:nvSpPr>
+        <p:spPr>
+          <a:xfrm>
+            <a:off x="1700784" y="5029200"/>
+            <a:ext cx="932688" cy="73152"/>
+          </a:xfrm>
+          <a:prstGeom prst="line">
+            <a:avLst/>
+          </a:prstGeom>
+          <a:noFill/>
+          <a:ln w="12700">
+            <a:solidFill>
+              <a:srgbClr val="DCE6EE"/>
+            </a:solidFill>
+            <a:prstDash val="solid"/>
+            <a:tailEnd type="triangle"/>
+          </a:ln>
+        </p:spPr>
+      </p:sp>
+      <p:sp>
+        <p:nvSpPr>
+          <p:cNvPr id="21" name="Shape 19"/>
+          <p:cNvSpPr/>
+          <p:nvPr/>
+        </p:nvSpPr>
+        <p:spPr>
+          <a:xfrm>
+            <a:off x="2761488" y="4325112"/>
+            <a:ext cx="786384" cy="502920"/>
+          </a:xfrm>
+          <a:prstGeom prst="roundRect">
+            <a:avLst>
+              <a:gd name="adj" fmla="val 10909"/>
+            </a:avLst>
+          </a:prstGeom>
+          <a:solidFill>
+            <a:srgbClr val="061426"/>
+          </a:solidFill>
+          <a:ln w="12700">
+            <a:solidFill>
+              <a:srgbClr val="061426">
+                <a:alpha val="0"/>
+              </a:srgbClr>
+            </a:solidFill>
+            <a:prstDash val="solid"/>
+          </a:ln>
+        </p:spPr>
+      </p:sp>
+      <p:sp>
+        <p:nvSpPr>
+          <p:cNvPr id="22" name="Text 20"/>
+          <p:cNvSpPr/>
+          <p:nvPr/>
+        </p:nvSpPr>
+        <p:spPr>
+          <a:xfrm>
+            <a:off x="2761488" y="4498848"/>
+            <a:ext cx="786384" cy="82296"/>
+          </a:xfrm>
+          <a:prstGeom prst="rect">
+            <a:avLst/>
+          </a:prstGeom>
+          <a:noFill/>
+          <a:ln/>
+        </p:spPr>
+        <p:txBody>
+          <a:bodyPr wrap="square" lIns="0" tIns="0" rIns="0" bIns="0" rtlCol="0" anchor="ctr"/>
+          <a:lstStyle/>
+          <a:p>
+            <a:pPr algn="ctr" indent="0" marL="0">
+              <a:buNone/>
+            </a:pPr>
+            <a:r>
+              <a:rPr lang="en-US" sz="1500" b="1" dirty="0">
+                <a:solidFill>
+                  <a:srgbClr val="86EFE3"/>
+                </a:solidFill>
+                <a:latin typeface="Helvetica Neue" pitchFamily="34" charset="0"/>
+                <a:ea typeface="Helvetica Neue" pitchFamily="34" charset="-122"/>
+                <a:cs typeface="Helvetica Neue" pitchFamily="34" charset="-120"/>
+              </a:rPr>
+              <a:t>AI</a:t>
+            </a:r>
+            <a:endParaRPr lang="en-US" sz="1500" dirty="0"/>
+          </a:p>
+        </p:txBody>
+      </p:sp>
+      <p:sp>
+        <p:nvSpPr>
+          <p:cNvPr id="23" name="Shape 21"/>
+          <p:cNvSpPr/>
+          <p:nvPr/>
+        </p:nvSpPr>
+        <p:spPr>
+          <a:xfrm>
+            <a:off x="3584448" y="4572000"/>
+            <a:ext cx="475488" cy="0"/>
+          </a:xfrm>
+          <a:prstGeom prst="line">
+            <a:avLst/>
+          </a:prstGeom>
+          <a:noFill/>
+          <a:ln w="20320">
+            <a:solidFill>
+              <a:srgbClr val="14B8A6"/>
+            </a:solidFill>
+            <a:prstDash val="solid"/>
+            <a:tailEnd type="triangle"/>
+          </a:ln>
+        </p:spPr>
+      </p:sp>
+      <p:sp>
+        <p:nvSpPr>
+          <p:cNvPr id="24" name="Shape 22"/>
+          <p:cNvSpPr/>
+          <p:nvPr/>
+        </p:nvSpPr>
+        <p:spPr>
+          <a:xfrm>
+            <a:off x="4151376" y="4270248"/>
+            <a:ext cx="868680" cy="621792"/>
+          </a:xfrm>
+          <a:prstGeom prst="roundRect">
+            <a:avLst>
+              <a:gd name="adj" fmla="val 8824"/>
+            </a:avLst>
+          </a:prstGeom>
+          <a:solidFill>
+            <a:srgbClr val="14B8A6"/>
+          </a:solidFill>
+          <a:ln w="12700">
+            <a:solidFill>
+              <a:srgbClr val="14B8A6">
+                <a:alpha val="0"/>
+              </a:srgbClr>
+            </a:solidFill>
+            <a:prstDash val="solid"/>
+          </a:ln>
+        </p:spPr>
+      </p:sp>
+      <p:sp>
+        <p:nvSpPr>
+          <p:cNvPr id="25" name="Text 23"/>
+          <p:cNvSpPr/>
+          <p:nvPr/>
+        </p:nvSpPr>
+        <p:spPr>
+          <a:xfrm>
+            <a:off x="4242816" y="4480560"/>
+            <a:ext cx="685800" cy="73152"/>
+          </a:xfrm>
+          <a:prstGeom prst="rect">
+            <a:avLst/>
+          </a:prstGeom>
+          <a:noFill/>
+          <a:ln/>
+        </p:spPr>
+        <p:txBody>
+          <a:bodyPr wrap="square" lIns="0" tIns="0" rIns="0" bIns="0" rtlCol="0" anchor="ctr"/>
+          <a:lstStyle/>
+          <a:p>
+            <a:pPr algn="ctr" indent="0" marL="0">
+              <a:buNone/>
+            </a:pPr>
+            <a:r>
+              <a:rPr lang="en-US" sz="700" b="1" dirty="0">
+                <a:solidFill>
+                  <a:srgbClr val="063C36"/>
+                </a:solidFill>
+                <a:latin typeface="Helvetica Neue" pitchFamily="34" charset="0"/>
+                <a:ea typeface="Helvetica Neue" pitchFamily="34" charset="-122"/>
+                <a:cs typeface="Helvetica Neue" pitchFamily="34" charset="-120"/>
+              </a:rPr>
+              <a:t>Output</a:t>
+            </a:r>
+            <a:endParaRPr lang="en-US" sz="700" dirty="0"/>
+          </a:p>
+        </p:txBody>
+      </p:sp>
+      <p:sp>
+        <p:nvSpPr>
+          <p:cNvPr id="26" name="Text 24"/>
+          <p:cNvSpPr/>
+          <p:nvPr/>
+        </p:nvSpPr>
+        <p:spPr>
+          <a:xfrm>
+            <a:off x="841248" y="5093208"/>
+            <a:ext cx="4288536" cy="109728"/>
+          </a:xfrm>
+          <a:prstGeom prst="rect">
+            <a:avLst/>
+          </a:prstGeom>
+          <a:noFill/>
+          <a:ln/>
+        </p:spPr>
+        <p:txBody>
+          <a:bodyPr wrap="square" lIns="0" tIns="0" rIns="0" bIns="0" rtlCol="0" anchor="ctr">
+            <a:normAutofit/>
+          </a:bodyPr>
+          <a:lstStyle/>
+          <a:p>
+            <a:pPr algn="ctr" indent="0" marL="0">
+              <a:buNone/>
+            </a:pPr>
+            <a:r>
+              <a:rPr lang="en-US" sz="780" i="1" dirty="0">
+                <a:solidFill>
+                  <a:srgbClr val="6B7A90"/>
+                </a:solidFill>
+                <a:latin typeface="Helvetica Neue" pitchFamily="34" charset="0"/>
+                <a:ea typeface="Helvetica Neue" pitchFamily="34" charset="-122"/>
+                <a:cs typeface="Helvetica Neue" pitchFamily="34" charset="-120"/>
+              </a:rPr>
+              <a:t>unstable next step · expert operator required</a:t>
+            </a:r>
+            <a:endParaRPr lang="en-US" sz="780" dirty="0"/>
+          </a:p>
+        </p:txBody>
+      </p:sp>
+      <p:sp>
+        <p:nvSpPr>
+          <p:cNvPr id="27" name="Shape 25"/>
+          <p:cNvSpPr/>
+          <p:nvPr/>
+        </p:nvSpPr>
+        <p:spPr>
+          <a:xfrm>
+            <a:off x="5897880" y="3337560"/>
+            <a:ext cx="5687568" cy="2084832"/>
+          </a:xfrm>
+          <a:prstGeom prst="roundRect">
+            <a:avLst>
+              <a:gd name="adj" fmla="val 2632"/>
+            </a:avLst>
+          </a:prstGeom>
+          <a:solidFill>
+            <a:srgbClr val="061426"/>
+          </a:solidFill>
+          <a:ln w="12700">
+            <a:solidFill>
+              <a:srgbClr val="061426">
+                <a:alpha val="0"/>
+              </a:srgbClr>
+            </a:solidFill>
+            <a:prstDash val="solid"/>
+          </a:ln>
+        </p:spPr>
+      </p:sp>
+      <p:sp>
+        <p:nvSpPr>
+          <p:cNvPr id="28" name="Text 26"/>
+          <p:cNvSpPr/>
+          <p:nvPr/>
+        </p:nvSpPr>
+        <p:spPr>
+          <a:xfrm>
+            <a:off x="6135624" y="3538728"/>
+            <a:ext cx="1828800" cy="146304"/>
+          </a:xfrm>
+          <a:prstGeom prst="rect">
+            <a:avLst/>
+          </a:prstGeom>
+          <a:noFill/>
+          <a:ln/>
+        </p:spPr>
+        <p:txBody>
+          <a:bodyPr wrap="square" lIns="0" tIns="0" rIns="0" bIns="0" rtlCol="0" anchor="ctr"/>
+          <a:lstStyle/>
+          <a:p>
+            <a:pPr indent="0" marL="0">
+              <a:buNone/>
+            </a:pPr>
+            <a:r>
+              <a:rPr lang="en-US" sz="1100" b="1" dirty="0">
+                <a:solidFill>
+                  <a:srgbClr val="FFFFFF"/>
+                </a:solidFill>
+                <a:latin typeface="Helvetica Neue" pitchFamily="34" charset="0"/>
+                <a:ea typeface="Helvetica Neue" pitchFamily="34" charset="-122"/>
+                <a:cs typeface="Helvetica Neue" pitchFamily="34" charset="-120"/>
+              </a:rPr>
+              <a:t>DAG Harness</a:t>
+            </a:r>
+            <a:endParaRPr lang="en-US" sz="1100" dirty="0"/>
+          </a:p>
+        </p:txBody>
+      </p:sp>
+      <p:sp>
+        <p:nvSpPr>
+          <p:cNvPr id="29" name="Shape 27"/>
+          <p:cNvSpPr/>
+          <p:nvPr/>
+        </p:nvSpPr>
+        <p:spPr>
+          <a:xfrm>
+            <a:off x="6153912" y="4187952"/>
+            <a:ext cx="676656" cy="530352"/>
+          </a:xfrm>
+          <a:prstGeom prst="roundRect">
+            <a:avLst>
+              <a:gd name="adj" fmla="val 10345"/>
+            </a:avLst>
+          </a:prstGeom>
+          <a:solidFill>
+            <a:srgbClr val="102947"/>
+          </a:solidFill>
+          <a:ln w="12700">
+            <a:solidFill>
+              <a:srgbClr val="2A4868"/>
+            </a:solidFill>
+            <a:prstDash val="solid"/>
+          </a:ln>
+        </p:spPr>
+      </p:sp>
+      <p:sp>
+        <p:nvSpPr>
+          <p:cNvPr id="30" name="Text 28"/>
+          <p:cNvSpPr/>
+          <p:nvPr/>
+        </p:nvSpPr>
+        <p:spPr>
+          <a:xfrm>
+            <a:off x="6199632" y="4325112"/>
+            <a:ext cx="585216" cy="73152"/>
+          </a:xfrm>
+          <a:prstGeom prst="rect">
+            <a:avLst/>
+          </a:prstGeom>
+          <a:noFill/>
+          <a:ln/>
+        </p:spPr>
+        <p:txBody>
+          <a:bodyPr wrap="square" lIns="0" tIns="0" rIns="0" bIns="0" rtlCol="0" anchor="ctr">
+            <a:normAutofit/>
+          </a:bodyPr>
+          <a:lstStyle/>
+          <a:p>
+            <a:pPr algn="ctr" indent="0" marL="0">
+              <a:buNone/>
+            </a:pPr>
+            <a:r>
+              <a:rPr lang="en-US" sz="620" b="1" dirty="0">
+                <a:solidFill>
+                  <a:srgbClr val="FFFFFF"/>
+                </a:solidFill>
+                <a:latin typeface="Helvetica Neue" pitchFamily="34" charset="0"/>
+                <a:ea typeface="Helvetica Neue" pitchFamily="34" charset="-122"/>
+                <a:cs typeface="Helvetica Neue" pitchFamily="34" charset="-120"/>
+              </a:rPr>
+              <a:t>Intent</a:t>
+            </a:r>
+            <a:endParaRPr lang="en-US" sz="620" dirty="0"/>
+          </a:p>
+        </p:txBody>
+      </p:sp>
+      <p:sp>
+        <p:nvSpPr>
+          <p:cNvPr id="31" name="Text 29"/>
+          <p:cNvSpPr/>
+          <p:nvPr/>
+        </p:nvSpPr>
+        <p:spPr>
+          <a:xfrm>
+            <a:off x="6199632" y="4498848"/>
+            <a:ext cx="585216" cy="54864"/>
+          </a:xfrm>
+          <a:prstGeom prst="rect">
+            <a:avLst/>
+          </a:prstGeom>
+          <a:noFill/>
+          <a:ln/>
+        </p:spPr>
+        <p:txBody>
+          <a:bodyPr wrap="square" lIns="0" tIns="0" rIns="0" bIns="0" rtlCol="0" anchor="ctr">
+            <a:normAutofit/>
+          </a:bodyPr>
+          <a:lstStyle/>
+          <a:p>
+            <a:pPr algn="ctr" indent="0" marL="0">
+              <a:buNone/>
+            </a:pPr>
+            <a:r>
+              <a:rPr lang="en-US" sz="540" dirty="0">
+                <a:solidFill>
+                  <a:srgbClr val="9CB0C6"/>
+                </a:solidFill>
+                <a:latin typeface="Helvetica Neue" pitchFamily="34" charset="0"/>
+                <a:ea typeface="Helvetica Neue" pitchFamily="34" charset="-122"/>
+                <a:cs typeface="Helvetica Neue" pitchFamily="34" charset="-120"/>
+              </a:rPr>
+              <a:t>input</a:t>
+            </a:r>
+            <a:endParaRPr lang="en-US" sz="540" dirty="0"/>
+          </a:p>
+        </p:txBody>
+      </p:sp>
+      <p:sp>
+        <p:nvSpPr>
+          <p:cNvPr id="32" name="Shape 30"/>
+          <p:cNvSpPr/>
+          <p:nvPr/>
+        </p:nvSpPr>
+        <p:spPr>
+          <a:xfrm>
+            <a:off x="6830568" y="4453128"/>
+            <a:ext cx="182880" cy="0"/>
+          </a:xfrm>
+          <a:prstGeom prst="line">
+            <a:avLst/>
+          </a:prstGeom>
+          <a:noFill/>
+          <a:ln w="15240">
+            <a:solidFill>
+              <a:srgbClr val="86EFE3"/>
+            </a:solidFill>
+            <a:prstDash val="solid"/>
+            <a:tailEnd type="triangle"/>
+          </a:ln>
+        </p:spPr>
+      </p:sp>
+      <p:sp>
+        <p:nvSpPr>
+          <p:cNvPr id="33" name="Shape 31"/>
+          <p:cNvSpPr/>
+          <p:nvPr/>
+        </p:nvSpPr>
+        <p:spPr>
+          <a:xfrm>
+            <a:off x="7013448" y="4187952"/>
+            <a:ext cx="676656" cy="530352"/>
+          </a:xfrm>
+          <a:prstGeom prst="roundRect">
+            <a:avLst>
+              <a:gd name="adj" fmla="val 10345"/>
+            </a:avLst>
+          </a:prstGeom>
+          <a:solidFill>
+            <a:srgbClr val="102947"/>
+          </a:solidFill>
+          <a:ln w="12700">
+            <a:solidFill>
+              <a:srgbClr val="2A4868"/>
+            </a:solidFill>
+            <a:prstDash val="solid"/>
+          </a:ln>
+        </p:spPr>
+      </p:sp>
+      <p:sp>
+        <p:nvSpPr>
+          <p:cNvPr id="34" name="Text 32"/>
+          <p:cNvSpPr/>
+          <p:nvPr/>
+        </p:nvSpPr>
+        <p:spPr>
+          <a:xfrm>
+            <a:off x="7059168" y="4325112"/>
+            <a:ext cx="585216" cy="73152"/>
+          </a:xfrm>
+          <a:prstGeom prst="rect">
+            <a:avLst/>
+          </a:prstGeom>
+          <a:noFill/>
+          <a:ln/>
+        </p:spPr>
+        <p:txBody>
+          <a:bodyPr wrap="square" lIns="0" tIns="0" rIns="0" bIns="0" rtlCol="0" anchor="ctr">
+            <a:normAutofit/>
+          </a:bodyPr>
+          <a:lstStyle/>
+          <a:p>
+            <a:pPr algn="ctr" indent="0" marL="0">
+              <a:buNone/>
+            </a:pPr>
+            <a:r>
+              <a:rPr lang="en-US" sz="620" b="1" dirty="0">
+                <a:solidFill>
+                  <a:srgbClr val="FFFFFF"/>
+                </a:solidFill>
+                <a:latin typeface="Helvetica Neue" pitchFamily="34" charset="0"/>
+                <a:ea typeface="Helvetica Neue" pitchFamily="34" charset="-122"/>
+                <a:cs typeface="Helvetica Neue" pitchFamily="34" charset="-120"/>
+              </a:rPr>
+              <a:t>Manifest</a:t>
+            </a:r>
+            <a:endParaRPr lang="en-US" sz="620" dirty="0"/>
+          </a:p>
+        </p:txBody>
+      </p:sp>
+      <p:sp>
+        <p:nvSpPr>
+          <p:cNvPr id="35" name="Text 33"/>
+          <p:cNvSpPr/>
+          <p:nvPr/>
+        </p:nvSpPr>
+        <p:spPr>
+          <a:xfrm>
+            <a:off x="7059168" y="4498848"/>
+            <a:ext cx="585216" cy="54864"/>
+          </a:xfrm>
+          <a:prstGeom prst="rect">
+            <a:avLst/>
+          </a:prstGeom>
+          <a:noFill/>
+          <a:ln/>
+        </p:spPr>
+        <p:txBody>
+          <a:bodyPr wrap="square" lIns="0" tIns="0" rIns="0" bIns="0" rtlCol="0" anchor="ctr">
+            <a:normAutofit/>
+          </a:bodyPr>
+          <a:lstStyle/>
+          <a:p>
+            <a:pPr algn="ctr" indent="0" marL="0">
+              <a:buNone/>
+            </a:pPr>
+            <a:r>
+              <a:rPr lang="en-US" sz="540" dirty="0">
+                <a:solidFill>
+                  <a:srgbClr val="9CB0C6"/>
+                </a:solidFill>
+                <a:latin typeface="Helvetica Neue" pitchFamily="34" charset="0"/>
+                <a:ea typeface="Helvetica Neue" pitchFamily="34" charset="-122"/>
+                <a:cs typeface="Helvetica Neue" pitchFamily="34" charset="-120"/>
+              </a:rPr>
+              <a:t>contract</a:t>
+            </a:r>
+            <a:endParaRPr lang="en-US" sz="540" dirty="0"/>
+          </a:p>
+        </p:txBody>
+      </p:sp>
+      <p:sp>
+        <p:nvSpPr>
+          <p:cNvPr id="36" name="Shape 34"/>
+          <p:cNvSpPr/>
+          <p:nvPr/>
+        </p:nvSpPr>
+        <p:spPr>
+          <a:xfrm>
+            <a:off x="7690104" y="4453128"/>
+            <a:ext cx="182880" cy="0"/>
+          </a:xfrm>
+          <a:prstGeom prst="line">
+            <a:avLst/>
+          </a:prstGeom>
+          <a:noFill/>
+          <a:ln w="15240">
+            <a:solidFill>
+              <a:srgbClr val="86EFE3"/>
+            </a:solidFill>
+            <a:prstDash val="solid"/>
+            <a:tailEnd type="triangle"/>
+          </a:ln>
+        </p:spPr>
+      </p:sp>
+      <p:sp>
+        <p:nvSpPr>
+          <p:cNvPr id="37" name="Shape 35"/>
+          <p:cNvSpPr/>
+          <p:nvPr/>
+        </p:nvSpPr>
+        <p:spPr>
+          <a:xfrm>
+            <a:off x="7872984" y="4187952"/>
+            <a:ext cx="676656" cy="530352"/>
+          </a:xfrm>
+          <a:prstGeom prst="roundRect">
+            <a:avLst>
+              <a:gd name="adj" fmla="val 10345"/>
+            </a:avLst>
+          </a:prstGeom>
+          <a:solidFill>
+            <a:srgbClr val="14B8A6"/>
+          </a:solidFill>
+          <a:ln w="12700">
+            <a:solidFill>
+              <a:srgbClr val="14B8A6">
+                <a:alpha val="0"/>
+              </a:srgbClr>
+            </a:solidFill>
+            <a:prstDash val="solid"/>
+          </a:ln>
+        </p:spPr>
+      </p:sp>
+      <p:sp>
+        <p:nvSpPr>
+          <p:cNvPr id="38" name="Text 36"/>
+          <p:cNvSpPr/>
+          <p:nvPr/>
+        </p:nvSpPr>
+        <p:spPr>
+          <a:xfrm>
+            <a:off x="7918704" y="4325112"/>
+            <a:ext cx="585216" cy="73152"/>
+          </a:xfrm>
+          <a:prstGeom prst="rect">
+            <a:avLst/>
+          </a:prstGeom>
+          <a:noFill/>
+          <a:ln/>
+        </p:spPr>
+        <p:txBody>
+          <a:bodyPr wrap="square" lIns="0" tIns="0" rIns="0" bIns="0" rtlCol="0" anchor="ctr">
+            <a:normAutofit/>
+          </a:bodyPr>
+          <a:lstStyle/>
+          <a:p>
+            <a:pPr algn="ctr" indent="0" marL="0">
+              <a:buNone/>
+            </a:pPr>
+            <a:r>
+              <a:rPr lang="en-US" sz="620" b="1" dirty="0">
+                <a:solidFill>
+                  <a:srgbClr val="063C36"/>
+                </a:solidFill>
+                <a:latin typeface="Helvetica Neue" pitchFamily="34" charset="0"/>
+                <a:ea typeface="Helvetica Neue" pitchFamily="34" charset="-122"/>
+                <a:cs typeface="Helvetica Neue" pitchFamily="34" charset="-120"/>
+              </a:rPr>
+              <a:t>Generate</a:t>
+            </a:r>
+            <a:endParaRPr lang="en-US" sz="620" dirty="0"/>
+          </a:p>
+        </p:txBody>
+      </p:sp>
+      <p:sp>
+        <p:nvSpPr>
+          <p:cNvPr id="39" name="Text 37"/>
+          <p:cNvSpPr/>
+          <p:nvPr/>
+        </p:nvSpPr>
+        <p:spPr>
+          <a:xfrm>
+            <a:off x="7918704" y="4498848"/>
+            <a:ext cx="585216" cy="54864"/>
+          </a:xfrm>
+          <a:prstGeom prst="rect">
+            <a:avLst/>
+          </a:prstGeom>
+          <a:noFill/>
+          <a:ln/>
+        </p:spPr>
+        <p:txBody>
+          <a:bodyPr wrap="square" lIns="0" tIns="0" rIns="0" bIns="0" rtlCol="0" anchor="ctr">
+            <a:normAutofit/>
+          </a:bodyPr>
+          <a:lstStyle/>
+          <a:p>
+            <a:pPr algn="ctr" indent="0" marL="0">
+              <a:buNone/>
+            </a:pPr>
+            <a:r>
+              <a:rPr lang="en-US" sz="540" dirty="0">
+                <a:solidFill>
+                  <a:srgbClr val="063C36"/>
+                </a:solidFill>
+                <a:latin typeface="Helvetica Neue" pitchFamily="34" charset="0"/>
+                <a:ea typeface="Helvetica Neue" pitchFamily="34" charset="-122"/>
+                <a:cs typeface="Helvetica Neue" pitchFamily="34" charset="-120"/>
+              </a:rPr>
+              <a:t>AI</a:t>
+            </a:r>
+            <a:endParaRPr lang="en-US" sz="540" dirty="0"/>
+          </a:p>
+        </p:txBody>
+      </p:sp>
+      <p:sp>
+        <p:nvSpPr>
+          <p:cNvPr id="40" name="Shape 38"/>
+          <p:cNvSpPr/>
+          <p:nvPr/>
+        </p:nvSpPr>
+        <p:spPr>
+          <a:xfrm>
+            <a:off x="8549640" y="4453128"/>
+            <a:ext cx="182880" cy="0"/>
+          </a:xfrm>
+          <a:prstGeom prst="line">
+            <a:avLst/>
+          </a:prstGeom>
+          <a:noFill/>
+          <a:ln w="15240">
+            <a:solidFill>
+              <a:srgbClr val="86EFE3"/>
+            </a:solidFill>
+            <a:prstDash val="solid"/>
+            <a:tailEnd type="triangle"/>
+          </a:ln>
+        </p:spPr>
+      </p:sp>
+      <p:sp>
+        <p:nvSpPr>
+          <p:cNvPr id="41" name="Shape 39"/>
+          <p:cNvSpPr/>
+          <p:nvPr/>
+        </p:nvSpPr>
+        <p:spPr>
+          <a:xfrm>
+            <a:off x="8732520" y="4187952"/>
+            <a:ext cx="676656" cy="530352"/>
+          </a:xfrm>
+          <a:prstGeom prst="roundRect">
+            <a:avLst>
+              <a:gd name="adj" fmla="val 10345"/>
+            </a:avLst>
+          </a:prstGeom>
+          <a:solidFill>
+            <a:srgbClr val="102947"/>
+          </a:solidFill>
+          <a:ln w="12700">
+            <a:solidFill>
+              <a:srgbClr val="2A4868"/>
+            </a:solidFill>
+            <a:prstDash val="solid"/>
+          </a:ln>
+        </p:spPr>
+      </p:sp>
+      <p:sp>
+        <p:nvSpPr>
+          <p:cNvPr id="42" name="Text 40"/>
+          <p:cNvSpPr/>
+          <p:nvPr/>
+        </p:nvSpPr>
+        <p:spPr>
+          <a:xfrm>
+            <a:off x="8778240" y="4325112"/>
+            <a:ext cx="585216" cy="73152"/>
+          </a:xfrm>
+          <a:prstGeom prst="rect">
+            <a:avLst/>
+          </a:prstGeom>
+          <a:noFill/>
+          <a:ln/>
+        </p:spPr>
+        <p:txBody>
+          <a:bodyPr wrap="square" lIns="0" tIns="0" rIns="0" bIns="0" rtlCol="0" anchor="ctr">
+            <a:normAutofit/>
+          </a:bodyPr>
+          <a:lstStyle/>
+          <a:p>
+            <a:pPr algn="ctr" indent="0" marL="0">
+              <a:buNone/>
+            </a:pPr>
+            <a:r>
+              <a:rPr lang="en-US" sz="620" b="1" dirty="0">
+                <a:solidFill>
+                  <a:srgbClr val="FFFFFF"/>
+                </a:solidFill>
+                <a:latin typeface="Helvetica Neue" pitchFamily="34" charset="0"/>
+                <a:ea typeface="Helvetica Neue" pitchFamily="34" charset="-122"/>
+                <a:cs typeface="Helvetica Neue" pitchFamily="34" charset="-120"/>
+              </a:rPr>
+              <a:t>Check</a:t>
+            </a:r>
+            <a:endParaRPr lang="en-US" sz="620" dirty="0"/>
+          </a:p>
+        </p:txBody>
+      </p:sp>
+      <p:sp>
+        <p:nvSpPr>
+          <p:cNvPr id="43" name="Text 41"/>
+          <p:cNvSpPr/>
+          <p:nvPr/>
+        </p:nvSpPr>
+        <p:spPr>
+          <a:xfrm>
+            <a:off x="8778240" y="4498848"/>
+            <a:ext cx="585216" cy="54864"/>
+          </a:xfrm>
+          <a:prstGeom prst="rect">
+            <a:avLst/>
+          </a:prstGeom>
+          <a:noFill/>
+          <a:ln/>
+        </p:spPr>
+        <p:txBody>
+          <a:bodyPr wrap="square" lIns="0" tIns="0" rIns="0" bIns="0" rtlCol="0" anchor="ctr">
+            <a:normAutofit/>
+          </a:bodyPr>
+          <a:lstStyle/>
+          <a:p>
+            <a:pPr algn="ctr" indent="0" marL="0">
+              <a:buNone/>
+            </a:pPr>
+            <a:r>
+              <a:rPr lang="en-US" sz="540" dirty="0">
+                <a:solidFill>
+                  <a:srgbClr val="9CB0C6"/>
+                </a:solidFill>
+                <a:latin typeface="Helvetica Neue" pitchFamily="34" charset="0"/>
+                <a:ea typeface="Helvetica Neue" pitchFamily="34" charset="-122"/>
+                <a:cs typeface="Helvetica Neue" pitchFamily="34" charset="-120"/>
+              </a:rPr>
+              <a:t>lint</a:t>
+            </a:r>
+            <a:endParaRPr lang="en-US" sz="540" dirty="0"/>
+          </a:p>
+        </p:txBody>
+      </p:sp>
+      <p:sp>
+        <p:nvSpPr>
+          <p:cNvPr id="44" name="Shape 42"/>
+          <p:cNvSpPr/>
+          <p:nvPr/>
+        </p:nvSpPr>
+        <p:spPr>
+          <a:xfrm>
+            <a:off x="9409176" y="4453128"/>
+            <a:ext cx="182880" cy="0"/>
+          </a:xfrm>
+          <a:prstGeom prst="line">
+            <a:avLst/>
+          </a:prstGeom>
+          <a:noFill/>
+          <a:ln w="15240">
+            <a:solidFill>
+              <a:srgbClr val="86EFE3"/>
+            </a:solidFill>
+            <a:prstDash val="solid"/>
+            <a:tailEnd type="triangle"/>
+          </a:ln>
+        </p:spPr>
+      </p:sp>
+      <p:sp>
+        <p:nvSpPr>
+          <p:cNvPr id="45" name="Shape 43"/>
+          <p:cNvSpPr/>
+          <p:nvPr/>
+        </p:nvSpPr>
+        <p:spPr>
+          <a:xfrm>
+            <a:off x="9592056" y="4187952"/>
+            <a:ext cx="676656" cy="530352"/>
+          </a:xfrm>
+          <a:prstGeom prst="roundRect">
+            <a:avLst>
+              <a:gd name="adj" fmla="val 10345"/>
+            </a:avLst>
+          </a:prstGeom>
+          <a:solidFill>
+            <a:srgbClr val="14B8A6"/>
+          </a:solidFill>
+          <a:ln w="12700">
+            <a:solidFill>
+              <a:srgbClr val="14B8A6">
+                <a:alpha val="0"/>
+              </a:srgbClr>
+            </a:solidFill>
+            <a:prstDash val="solid"/>
+          </a:ln>
+        </p:spPr>
+      </p:sp>
+      <p:sp>
+        <p:nvSpPr>
+          <p:cNvPr id="46" name="Text 44"/>
+          <p:cNvSpPr/>
+          <p:nvPr/>
+        </p:nvSpPr>
+        <p:spPr>
+          <a:xfrm>
+            <a:off x="9637776" y="4325112"/>
+            <a:ext cx="585216" cy="73152"/>
+          </a:xfrm>
+          <a:prstGeom prst="rect">
+            <a:avLst/>
+          </a:prstGeom>
+          <a:noFill/>
+          <a:ln/>
+        </p:spPr>
+        <p:txBody>
+          <a:bodyPr wrap="square" lIns="0" tIns="0" rIns="0" bIns="0" rtlCol="0" anchor="ctr">
+            <a:normAutofit/>
+          </a:bodyPr>
+          <a:lstStyle/>
+          <a:p>
+            <a:pPr algn="ctr" indent="0" marL="0">
+              <a:buNone/>
+            </a:pPr>
+            <a:r>
+              <a:rPr lang="en-US" sz="620" b="1" dirty="0">
+                <a:solidFill>
+                  <a:srgbClr val="063C36"/>
+                </a:solidFill>
+                <a:latin typeface="Helvetica Neue" pitchFamily="34" charset="0"/>
+                <a:ea typeface="Helvetica Neue" pitchFamily="34" charset="-122"/>
+                <a:cs typeface="Helvetica Neue" pitchFamily="34" charset="-120"/>
+              </a:rPr>
+              <a:t>Repair</a:t>
+            </a:r>
+            <a:endParaRPr lang="en-US" sz="620" dirty="0"/>
+          </a:p>
+        </p:txBody>
+      </p:sp>
+      <p:sp>
+        <p:nvSpPr>
+          <p:cNvPr id="47" name="Text 45"/>
+          <p:cNvSpPr/>
+          <p:nvPr/>
+        </p:nvSpPr>
+        <p:spPr>
+          <a:xfrm>
+            <a:off x="9637776" y="4498848"/>
+            <a:ext cx="585216" cy="54864"/>
+          </a:xfrm>
+          <a:prstGeom prst="rect">
+            <a:avLst/>
+          </a:prstGeom>
+          <a:noFill/>
+          <a:ln/>
+        </p:spPr>
+        <p:txBody>
+          <a:bodyPr wrap="square" lIns="0" tIns="0" rIns="0" bIns="0" rtlCol="0" anchor="ctr">
+            <a:normAutofit/>
+          </a:bodyPr>
+          <a:lstStyle/>
+          <a:p>
+            <a:pPr algn="ctr" indent="0" marL="0">
+              <a:buNone/>
+            </a:pPr>
+            <a:r>
+              <a:rPr lang="en-US" sz="540" dirty="0">
+                <a:solidFill>
+                  <a:srgbClr val="063C36"/>
+                </a:solidFill>
+                <a:latin typeface="Helvetica Neue" pitchFamily="34" charset="0"/>
+                <a:ea typeface="Helvetica Neue" pitchFamily="34" charset="-122"/>
+                <a:cs typeface="Helvetica Neue" pitchFamily="34" charset="-120"/>
+              </a:rPr>
+              <a:t>AI</a:t>
+            </a:r>
+            <a:endParaRPr lang="en-US" sz="540" dirty="0"/>
+          </a:p>
+        </p:txBody>
+      </p:sp>
+      <p:sp>
+        <p:nvSpPr>
+          <p:cNvPr id="48" name="Shape 46"/>
+          <p:cNvSpPr/>
+          <p:nvPr/>
+        </p:nvSpPr>
+        <p:spPr>
+          <a:xfrm>
+            <a:off x="10268712" y="4453128"/>
+            <a:ext cx="182880" cy="0"/>
+          </a:xfrm>
+          <a:prstGeom prst="line">
+            <a:avLst/>
+          </a:prstGeom>
+          <a:noFill/>
+          <a:ln w="15240">
+            <a:solidFill>
+              <a:srgbClr val="86EFE3"/>
+            </a:solidFill>
+            <a:prstDash val="solid"/>
+            <a:tailEnd type="triangle"/>
+          </a:ln>
+        </p:spPr>
+      </p:sp>
+      <p:sp>
+        <p:nvSpPr>
+          <p:cNvPr id="49" name="Shape 47"/>
+          <p:cNvSpPr/>
+          <p:nvPr/>
+        </p:nvSpPr>
+        <p:spPr>
+          <a:xfrm>
+            <a:off x="10451592" y="4187952"/>
+            <a:ext cx="676656" cy="530352"/>
+          </a:xfrm>
+          <a:prstGeom prst="roundRect">
+            <a:avLst>
+              <a:gd name="adj" fmla="val 10345"/>
+            </a:avLst>
+          </a:prstGeom>
+          <a:solidFill>
+            <a:srgbClr val="102947"/>
+          </a:solidFill>
+          <a:ln w="12700">
+            <a:solidFill>
+              <a:srgbClr val="2A4868"/>
+            </a:solidFill>
+            <a:prstDash val="solid"/>
+          </a:ln>
+        </p:spPr>
+      </p:sp>
+      <p:sp>
+        <p:nvSpPr>
+          <p:cNvPr id="50" name="Text 48"/>
+          <p:cNvSpPr/>
+          <p:nvPr/>
+        </p:nvSpPr>
+        <p:spPr>
+          <a:xfrm>
+            <a:off x="10497312" y="4325112"/>
+            <a:ext cx="585216" cy="73152"/>
+          </a:xfrm>
+          <a:prstGeom prst="rect">
+            <a:avLst/>
+          </a:prstGeom>
+          <a:noFill/>
+          <a:ln/>
+        </p:spPr>
+        <p:txBody>
+          <a:bodyPr wrap="square" lIns="0" tIns="0" rIns="0" bIns="0" rtlCol="0" anchor="ctr">
+            <a:normAutofit/>
+          </a:bodyPr>
+          <a:lstStyle/>
+          <a:p>
+            <a:pPr algn="ctr" indent="0" marL="0">
+              <a:buNone/>
+            </a:pPr>
+            <a:r>
+              <a:rPr lang="en-US" sz="620" b="1" dirty="0">
+                <a:solidFill>
+                  <a:srgbClr val="FFFFFF"/>
+                </a:solidFill>
+                <a:latin typeface="Helvetica Neue" pitchFamily="34" charset="0"/>
+                <a:ea typeface="Helvetica Neue" pitchFamily="34" charset="-122"/>
+                <a:cs typeface="Helvetica Neue" pitchFamily="34" charset="-120"/>
+              </a:rPr>
+              <a:t>Preview</a:t>
+            </a:r>
+            <a:endParaRPr lang="en-US" sz="620" dirty="0"/>
+          </a:p>
+        </p:txBody>
+      </p:sp>
+      <p:sp>
+        <p:nvSpPr>
+          <p:cNvPr id="51" name="Text 49"/>
+          <p:cNvSpPr/>
+          <p:nvPr/>
+        </p:nvSpPr>
+        <p:spPr>
+          <a:xfrm>
+            <a:off x="10497312" y="4498848"/>
+            <a:ext cx="585216" cy="54864"/>
+          </a:xfrm>
+          <a:prstGeom prst="rect">
+            <a:avLst/>
+          </a:prstGeom>
+          <a:noFill/>
+          <a:ln/>
+        </p:spPr>
+        <p:txBody>
+          <a:bodyPr wrap="square" lIns="0" tIns="0" rIns="0" bIns="0" rtlCol="0" anchor="ctr">
+            <a:normAutofit/>
+          </a:bodyPr>
+          <a:lstStyle/>
+          <a:p>
+            <a:pPr algn="ctr" indent="0" marL="0">
+              <a:buNone/>
+            </a:pPr>
+            <a:r>
+              <a:rPr lang="en-US" sz="540" dirty="0">
+                <a:solidFill>
+                  <a:srgbClr val="9CB0C6"/>
+                </a:solidFill>
+                <a:latin typeface="Helvetica Neue" pitchFamily="34" charset="0"/>
+                <a:ea typeface="Helvetica Neue" pitchFamily="34" charset="-122"/>
+                <a:cs typeface="Helvetica Neue" pitchFamily="34" charset="-120"/>
+              </a:rPr>
+              <a:t>output</a:t>
+            </a:r>
+            <a:endParaRPr lang="en-US" sz="540" dirty="0"/>
+          </a:p>
+        </p:txBody>
+      </p:sp>
+      <p:sp>
+        <p:nvSpPr>
+          <p:cNvPr id="52" name="Text 50"/>
+          <p:cNvSpPr/>
+          <p:nvPr/>
+        </p:nvSpPr>
+        <p:spPr>
+          <a:xfrm>
+            <a:off x="6227064" y="5056632"/>
+            <a:ext cx="5029200" cy="118872"/>
+          </a:xfrm>
+          <a:prstGeom prst="rect">
+            <a:avLst/>
+          </a:prstGeom>
+          <a:noFill/>
+          <a:ln/>
+        </p:spPr>
+        <p:txBody>
+          <a:bodyPr wrap="square" lIns="0" tIns="0" rIns="0" bIns="0" rtlCol="0" anchor="ctr">
+            <a:normAutofit/>
+          </a:bodyPr>
+          <a:lstStyle/>
+          <a:p>
+            <a:pPr algn="ctr" indent="0" marL="0">
+              <a:buNone/>
+            </a:pPr>
+            <a:r>
+              <a:rPr lang="en-US" sz="840" dirty="0">
+                <a:solidFill>
+                  <a:srgbClr val="9CB0C6"/>
+                </a:solidFill>
+                <a:latin typeface="Helvetica Neue" pitchFamily="34" charset="0"/>
+                <a:ea typeface="Helvetica Neue" pitchFamily="34" charset="-122"/>
+                <a:cs typeface="Helvetica Neue" pitchFamily="34" charset="-120"/>
+              </a:rPr>
+              <a:t>Each node has typed input, expected output, validation and a defined next step.</a:t>
+            </a:r>
+            <a:endParaRPr lang="en-US" sz="840" dirty="0"/>
+          </a:p>
+        </p:txBody>
+      </p:sp>
+      <p:sp>
+        <p:nvSpPr>
+          <p:cNvPr id="53" name="Shape 51"/>
+          <p:cNvSpPr/>
+          <p:nvPr/>
+        </p:nvSpPr>
+        <p:spPr>
+          <a:xfrm>
+            <a:off x="585216" y="6327648"/>
+            <a:ext cx="11021263" cy="0"/>
+          </a:xfrm>
+          <a:prstGeom prst="line">
+            <a:avLst/>
+          </a:prstGeom>
+          <a:noFill/>
+          <a:ln w="12700">
+            <a:solidFill>
+              <a:srgbClr val="DCE6EE"/>
+            </a:solidFill>
+            <a:prstDash val="solid"/>
+          </a:ln>
+        </p:spPr>
+      </p:sp>
+      <p:sp>
+        <p:nvSpPr>
+          <p:cNvPr id="54" name="Text 52"/>
           <p:cNvSpPr/>
           <p:nvPr/>
         </p:nvSpPr>
@@ -3442,7 +4994,7 @@
       </p:sp>
       <p:sp>
         <p:nvSpPr>
-          <p:cNvPr id="11" name="Text 8"/>
+          <p:cNvPr id="55" name="Text 53"/>
           <p:cNvSpPr/>
           <p:nvPr/>
         </p:nvSpPr>
@@ -3490,6 +5042,375 @@
 <file path=ppt/slides/slide12.xml><?xml version="1.0" encoding="utf-8"?>
 <p:sld xmlns:a="http://schemas.openxmlformats.org/drawingml/2006/main" xmlns:r="http://schemas.openxmlformats.org/officeDocument/2006/relationships" xmlns:p="http://schemas.openxmlformats.org/presentationml/2006/main">
   <p:cSld name="Slide 12">
+    <p:bg>
+      <p:bgPr>
+        <a:solidFill>
+          <a:srgbClr val="F7FAFC"/>
+        </a:solidFill>
+      </p:bgPr>
+    </p:bg>
+    <p:spTree>
+      <p:nvGrpSpPr>
+        <p:cNvPr id="1" name=""/>
+        <p:cNvGrpSpPr/>
+        <p:nvPr/>
+      </p:nvGrpSpPr>
+      <p:grpSpPr>
+        <a:xfrm>
+          <a:off x="0" y="0"/>
+          <a:ext cx="0" cy="0"/>
+          <a:chOff x="0" y="0"/>
+          <a:chExt cx="0" cy="0"/>
+        </a:xfrm>
+      </p:grpSpPr>
+      <p:sp>
+        <p:nvSpPr>
+          <p:cNvPr id="2" name="Shape 0"/>
+          <p:cNvSpPr/>
+          <p:nvPr/>
+        </p:nvSpPr>
+        <p:spPr>
+          <a:xfrm>
+            <a:off x="585216" y="566928"/>
+            <a:ext cx="73152" cy="384048"/>
+          </a:xfrm>
+          <a:prstGeom prst="rect">
+            <a:avLst/>
+          </a:prstGeom>
+          <a:solidFill>
+            <a:srgbClr val="14B8A6"/>
+          </a:solidFill>
+          <a:ln w="12700">
+            <a:solidFill>
+              <a:srgbClr val="14B8A6"/>
+            </a:solidFill>
+            <a:prstDash val="solid"/>
+          </a:ln>
+        </p:spPr>
+      </p:sp>
+      <p:sp>
+        <p:nvSpPr>
+          <p:cNvPr id="3" name="Text 1"/>
+          <p:cNvSpPr/>
+          <p:nvPr/>
+        </p:nvSpPr>
+        <p:spPr>
+          <a:xfrm>
+            <a:off x="749808" y="621792"/>
+            <a:ext cx="310896" cy="146304"/>
+          </a:xfrm>
+          <a:prstGeom prst="rect">
+            <a:avLst/>
+          </a:prstGeom>
+          <a:noFill/>
+          <a:ln/>
+        </p:spPr>
+        <p:txBody>
+          <a:bodyPr wrap="square" lIns="0" tIns="0" rIns="0" bIns="0" rtlCol="0" anchor="ctr"/>
+          <a:lstStyle/>
+          <a:p>
+            <a:pPr indent="0" marL="0">
+              <a:buNone/>
+            </a:pPr>
+            <a:r>
+              <a:rPr lang="en-US" sz="850" b="1" dirty="0">
+                <a:solidFill>
+                  <a:srgbClr val="14B8A6"/>
+                </a:solidFill>
+                <a:latin typeface="Helvetica Neue" pitchFamily="34" charset="0"/>
+                <a:ea typeface="Helvetica Neue" pitchFamily="34" charset="-122"/>
+                <a:cs typeface="Helvetica Neue" pitchFamily="34" charset="-120"/>
+              </a:rPr>
+              <a:t>10</a:t>
+            </a:r>
+            <a:endParaRPr lang="en-US" sz="850" dirty="0"/>
+          </a:p>
+        </p:txBody>
+      </p:sp>
+      <p:sp>
+        <p:nvSpPr>
+          <p:cNvPr id="4" name="Text 2"/>
+          <p:cNvSpPr/>
+          <p:nvPr/>
+        </p:nvSpPr>
+        <p:spPr>
+          <a:xfrm>
+            <a:off x="1115568" y="612648"/>
+            <a:ext cx="4023360" cy="146304"/>
+          </a:xfrm>
+          <a:prstGeom prst="rect">
+            <a:avLst/>
+          </a:prstGeom>
+          <a:noFill/>
+          <a:ln/>
+        </p:spPr>
+        <p:txBody>
+          <a:bodyPr wrap="square" lIns="0" tIns="0" rIns="0" bIns="0" rtlCol="0" anchor="ctr"/>
+          <a:lstStyle/>
+          <a:p>
+            <a:pPr indent="0" marL="0">
+              <a:buNone/>
+            </a:pPr>
+            <a:r>
+              <a:rPr lang="en-US" sz="850" b="1" dirty="0">
+                <a:solidFill>
+                  <a:srgbClr val="14B8A6"/>
+                </a:solidFill>
+                <a:latin typeface="Helvetica Neue" pitchFamily="34" charset="0"/>
+                <a:ea typeface="Helvetica Neue" pitchFamily="34" charset="-122"/>
+                <a:cs typeface="Helvetica Neue" pitchFamily="34" charset="-120"/>
+              </a:rPr>
+              <a:t>ASSEMBLY WORKFLOW</a:t>
+            </a:r>
+            <a:endParaRPr lang="en-US" sz="850" dirty="0"/>
+          </a:p>
+        </p:txBody>
+      </p:sp>
+      <p:sp>
+        <p:nvSpPr>
+          <p:cNvPr id="5" name="Text 3"/>
+          <p:cNvSpPr/>
+          <p:nvPr/>
+        </p:nvSpPr>
+        <p:spPr>
+          <a:xfrm>
+            <a:off x="585216" y="1124712"/>
+            <a:ext cx="5852160" cy="1051560"/>
+          </a:xfrm>
+          <a:prstGeom prst="rect">
+            <a:avLst/>
+          </a:prstGeom>
+          <a:noFill/>
+          <a:ln/>
+        </p:spPr>
+        <p:txBody>
+          <a:bodyPr wrap="square" lIns="0" tIns="0" rIns="0" bIns="0" rtlCol="0" anchor="ctr">
+            <a:normAutofit/>
+          </a:bodyPr>
+          <a:lstStyle/>
+          <a:p>
+            <a:pPr indent="0" marL="0">
+              <a:buNone/>
+            </a:pPr>
+            <a:r>
+              <a:rPr lang="en-US" sz="3100" b="1" dirty="0">
+                <a:solidFill>
+                  <a:srgbClr val="0B1628"/>
+                </a:solidFill>
+                <a:latin typeface="Helvetica Neue" pitchFamily="34" charset="0"/>
+                <a:ea typeface="Helvetica Neue" pitchFamily="34" charset="-122"/>
+                <a:cs typeface="Helvetica Neue" pitchFamily="34" charset="-120"/>
+              </a:rPr>
+              <a:t>Components can be searched and assembled inside the DAG.</a:t>
+            </a:r>
+            <a:endParaRPr lang="en-US" sz="3100" dirty="0"/>
+          </a:p>
+        </p:txBody>
+      </p:sp>
+      <p:sp>
+        <p:nvSpPr>
+          <p:cNvPr id="6" name="Text 4"/>
+          <p:cNvSpPr/>
+          <p:nvPr/>
+        </p:nvSpPr>
+        <p:spPr>
+          <a:xfrm>
+            <a:off x="585216" y="2542032"/>
+            <a:ext cx="4937760" cy="1188720"/>
+          </a:xfrm>
+          <a:prstGeom prst="rect">
+            <a:avLst/>
+          </a:prstGeom>
+          <a:noFill/>
+          <a:ln/>
+        </p:spPr>
+        <p:txBody>
+          <a:bodyPr wrap="square" lIns="0" tIns="0" rIns="0" bIns="0" rtlCol="0" anchor="ctr">
+            <a:normAutofit/>
+          </a:bodyPr>
+          <a:lstStyle/>
+          <a:p>
+            <a:pPr indent="0" marL="0">
+              <a:buNone/>
+            </a:pPr>
+            <a:r>
+              <a:rPr lang="en-US" sz="1220" dirty="0">
+                <a:solidFill>
+                  <a:srgbClr val="263A52"/>
+                </a:solidFill>
+                <a:latin typeface="Helvetica Neue" pitchFamily="34" charset="0"/>
+                <a:ea typeface="Helvetica Neue" pitchFamily="34" charset="-122"/>
+                <a:cs typeface="Helvetica Neue" pitchFamily="34" charset="-120"/>
+              </a:rPr>
+              <a:t>A workflow node searches the factory, AI confirms fit, selected components are installed, dependencies close, and the final VL app is linted and compiled.</a:t>
+            </a:r>
+            <a:endParaRPr lang="en-US" sz="1220" dirty="0"/>
+          </a:p>
+        </p:txBody>
+      </p:sp>
+      <p:sp>
+        <p:nvSpPr>
+          <p:cNvPr id="7" name="Shape 5"/>
+          <p:cNvSpPr/>
+          <p:nvPr/>
+        </p:nvSpPr>
+        <p:spPr>
+          <a:xfrm>
+            <a:off x="6400800" y="1463040"/>
+            <a:ext cx="5166360" cy="3353889"/>
+          </a:xfrm>
+          <a:prstGeom prst="roundRect">
+            <a:avLst>
+              <a:gd name="adj" fmla="val 1636"/>
+            </a:avLst>
+          </a:prstGeom>
+          <a:solidFill>
+            <a:srgbClr val="FFFFFF"/>
+          </a:solidFill>
+          <a:ln w="12700">
+            <a:solidFill>
+              <a:srgbClr val="DCE6EE"/>
+            </a:solidFill>
+            <a:prstDash val="solid"/>
+          </a:ln>
+        </p:spPr>
+      </p:sp>
+      <p:pic>
+        <p:nvPicPr>
+          <p:cNvPr id="8" name="Image 0" descr="/Users/ivx/Documents/VLC-Marketing/brief/assets/vlc-flow-mode-2026-04-14.png">    </p:cNvPr>
+          <p:cNvPicPr>
+            <a:picLocks noChangeAspect="1"/>
+          </p:cNvPicPr>
+          <p:nvPr/>
+        </p:nvPicPr>
+        <p:blipFill>
+          <a:blip r:embed="rId1"/>
+          <a:stretch>
+            <a:fillRect/>
+          </a:stretch>
+        </p:blipFill>
+        <p:spPr>
+          <a:xfrm>
+            <a:off x="6446520" y="1508760"/>
+            <a:ext cx="5074920" cy="3262449"/>
+          </a:xfrm>
+          <a:prstGeom prst="rect">
+            <a:avLst/>
+          </a:prstGeom>
+        </p:spPr>
+      </p:pic>
+      <p:sp>
+        <p:nvSpPr>
+          <p:cNvPr id="9" name="Shape 6"/>
+          <p:cNvSpPr/>
+          <p:nvPr/>
+        </p:nvSpPr>
+        <p:spPr>
+          <a:xfrm>
+            <a:off x="585216" y="6327648"/>
+            <a:ext cx="11021263" cy="0"/>
+          </a:xfrm>
+          <a:prstGeom prst="line">
+            <a:avLst/>
+          </a:prstGeom>
+          <a:noFill/>
+          <a:ln w="12700">
+            <a:solidFill>
+              <a:srgbClr val="DCE6EE"/>
+            </a:solidFill>
+            <a:prstDash val="solid"/>
+          </a:ln>
+        </p:spPr>
+      </p:sp>
+      <p:sp>
+        <p:nvSpPr>
+          <p:cNvPr id="10" name="Text 7"/>
+          <p:cNvSpPr/>
+          <p:nvPr/>
+        </p:nvSpPr>
+        <p:spPr>
+          <a:xfrm>
+            <a:off x="585216" y="6419088"/>
+            <a:ext cx="3840480" cy="201168"/>
+          </a:xfrm>
+          <a:prstGeom prst="rect">
+            <a:avLst/>
+          </a:prstGeom>
+          <a:noFill/>
+          <a:ln/>
+        </p:spPr>
+        <p:txBody>
+          <a:bodyPr wrap="square" lIns="0" tIns="0" rIns="0" bIns="0" rtlCol="0" anchor="ctr"/>
+          <a:lstStyle/>
+          <a:p>
+            <a:pPr indent="0" marL="0">
+              <a:buNone/>
+            </a:pPr>
+            <a:r>
+              <a:rPr lang="en-US" sz="820" dirty="0">
+                <a:solidFill>
+                  <a:srgbClr val="6B7A90"/>
+                </a:solidFill>
+                <a:latin typeface="Helvetica Neue" pitchFamily="34" charset="0"/>
+                <a:ea typeface="Helvetica Neue" pitchFamily="34" charset="-122"/>
+                <a:cs typeface="Helvetica Neue" pitchFamily="34" charset="-120"/>
+              </a:rPr>
+              <a:t>VL-Code · Local AI-native IDE</a:t>
+            </a:r>
+            <a:endParaRPr lang="en-US" sz="820" dirty="0"/>
+          </a:p>
+        </p:txBody>
+      </p:sp>
+      <p:sp>
+        <p:nvSpPr>
+          <p:cNvPr id="11" name="Text 8"/>
+          <p:cNvSpPr/>
+          <p:nvPr/>
+        </p:nvSpPr>
+        <p:spPr>
+          <a:xfrm>
+            <a:off x="7491679" y="6419088"/>
+            <a:ext cx="4114800" cy="201168"/>
+          </a:xfrm>
+          <a:prstGeom prst="rect">
+            <a:avLst/>
+          </a:prstGeom>
+          <a:noFill/>
+          <a:ln/>
+        </p:spPr>
+        <p:txBody>
+          <a:bodyPr wrap="square" lIns="0" tIns="0" rIns="0" bIns="0" rtlCol="0" anchor="ctr"/>
+          <a:lstStyle/>
+          <a:p>
+            <a:pPr algn="r" indent="0" marL="0">
+              <a:buNone/>
+            </a:pPr>
+            <a:r>
+              <a:rPr lang="en-US" sz="820" dirty="0">
+                <a:solidFill>
+                  <a:srgbClr val="6B7A90"/>
+                </a:solidFill>
+                <a:latin typeface="Helvetica Neue" pitchFamily="34" charset="0"/>
+                <a:ea typeface="Helvetica Neue" pitchFamily="34" charset="-122"/>
+                <a:cs typeface="Helvetica Neue" pitchFamily="34" charset="-120"/>
+              </a:rPr>
+              <a:t>github.com/VisualLogic-AI/VL-Code</a:t>
+            </a:r>
+            <a:endParaRPr lang="en-US" sz="820" dirty="0"/>
+          </a:p>
+        </p:txBody>
+      </p:sp>
+    </p:spTree>
+  </p:cSld>
+  <p:clrMapOvr>
+    <a:masterClrMapping/>
+  </p:clrMapOvr>
+</p:sld>
+</file>
+
+<file path=ppt/slides/slide13.xml><?xml version="1.0" encoding="utf-8"?>
+<p:sld xmlns:a="http://schemas.openxmlformats.org/drawingml/2006/main" xmlns:r="http://schemas.openxmlformats.org/officeDocument/2006/relationships" xmlns:p="http://schemas.openxmlformats.org/presentationml/2006/main">
+  <p:cSld name="Slide 13">
     <p:bg>
       <p:bgPr>
         <a:solidFill>
@@ -4233,375 +6154,6 @@
               <a:t>Reuse stored engineering capability instead of regenerating it</a:t>
             </a:r>
             <a:endParaRPr lang="en-US" sz="780" dirty="0"/>
-          </a:p>
-        </p:txBody>
-      </p:sp>
-    </p:spTree>
-  </p:cSld>
-  <p:clrMapOvr>
-    <a:masterClrMapping/>
-  </p:clrMapOvr>
-</p:sld>
-</file>
-
-<file path=ppt/slides/slide13.xml><?xml version="1.0" encoding="utf-8"?>
-<p:sld xmlns:a="http://schemas.openxmlformats.org/drawingml/2006/main" xmlns:r="http://schemas.openxmlformats.org/officeDocument/2006/relationships" xmlns:p="http://schemas.openxmlformats.org/presentationml/2006/main">
-  <p:cSld name="Slide 13">
-    <p:bg>
-      <p:bgPr>
-        <a:solidFill>
-          <a:srgbClr val="F7FAFC"/>
-        </a:solidFill>
-      </p:bgPr>
-    </p:bg>
-    <p:spTree>
-      <p:nvGrpSpPr>
-        <p:cNvPr id="1" name=""/>
-        <p:cNvGrpSpPr/>
-        <p:nvPr/>
-      </p:nvGrpSpPr>
-      <p:grpSpPr>
-        <a:xfrm>
-          <a:off x="0" y="0"/>
-          <a:ext cx="0" cy="0"/>
-          <a:chOff x="0" y="0"/>
-          <a:chExt cx="0" cy="0"/>
-        </a:xfrm>
-      </p:grpSpPr>
-      <p:sp>
-        <p:nvSpPr>
-          <p:cNvPr id="2" name="Shape 0"/>
-          <p:cNvSpPr/>
-          <p:nvPr/>
-        </p:nvSpPr>
-        <p:spPr>
-          <a:xfrm>
-            <a:off x="585216" y="566928"/>
-            <a:ext cx="73152" cy="384048"/>
-          </a:xfrm>
-          <a:prstGeom prst="rect">
-            <a:avLst/>
-          </a:prstGeom>
-          <a:solidFill>
-            <a:srgbClr val="14B8A6"/>
-          </a:solidFill>
-          <a:ln w="12700">
-            <a:solidFill>
-              <a:srgbClr val="14B8A6"/>
-            </a:solidFill>
-            <a:prstDash val="solid"/>
-          </a:ln>
-        </p:spPr>
-      </p:sp>
-      <p:sp>
-        <p:nvSpPr>
-          <p:cNvPr id="3" name="Text 1"/>
-          <p:cNvSpPr/>
-          <p:nvPr/>
-        </p:nvSpPr>
-        <p:spPr>
-          <a:xfrm>
-            <a:off x="749808" y="621792"/>
-            <a:ext cx="310896" cy="146304"/>
-          </a:xfrm>
-          <a:prstGeom prst="rect">
-            <a:avLst/>
-          </a:prstGeom>
-          <a:noFill/>
-          <a:ln/>
-        </p:spPr>
-        <p:txBody>
-          <a:bodyPr wrap="square" lIns="0" tIns="0" rIns="0" bIns="0" rtlCol="0" anchor="ctr"/>
-          <a:lstStyle/>
-          <a:p>
-            <a:pPr indent="0" marL="0">
-              <a:buNone/>
-            </a:pPr>
-            <a:r>
-              <a:rPr lang="en-US" sz="850" b="1" dirty="0">
-                <a:solidFill>
-                  <a:srgbClr val="14B8A6"/>
-                </a:solidFill>
-                <a:latin typeface="Helvetica Neue" pitchFamily="34" charset="0"/>
-                <a:ea typeface="Helvetica Neue" pitchFamily="34" charset="-122"/>
-                <a:cs typeface="Helvetica Neue" pitchFamily="34" charset="-120"/>
-              </a:rPr>
-              <a:t>12</a:t>
-            </a:r>
-            <a:endParaRPr lang="en-US" sz="850" dirty="0"/>
-          </a:p>
-        </p:txBody>
-      </p:sp>
-      <p:sp>
-        <p:nvSpPr>
-          <p:cNvPr id="4" name="Text 2"/>
-          <p:cNvSpPr/>
-          <p:nvPr/>
-        </p:nvSpPr>
-        <p:spPr>
-          <a:xfrm>
-            <a:off x="1115568" y="612648"/>
-            <a:ext cx="4023360" cy="146304"/>
-          </a:xfrm>
-          <a:prstGeom prst="rect">
-            <a:avLst/>
-          </a:prstGeom>
-          <a:noFill/>
-          <a:ln/>
-        </p:spPr>
-        <p:txBody>
-          <a:bodyPr wrap="square" lIns="0" tIns="0" rIns="0" bIns="0" rtlCol="0" anchor="ctr"/>
-          <a:lstStyle/>
-          <a:p>
-            <a:pPr indent="0" marL="0">
-              <a:buNone/>
-            </a:pPr>
-            <a:r>
-              <a:rPr lang="en-US" sz="850" b="1" dirty="0">
-                <a:solidFill>
-                  <a:srgbClr val="14B8A6"/>
-                </a:solidFill>
-                <a:latin typeface="Helvetica Neue" pitchFamily="34" charset="0"/>
-                <a:ea typeface="Helvetica Neue" pitchFamily="34" charset="-122"/>
-                <a:cs typeface="Helvetica Neue" pitchFamily="34" charset="-120"/>
-              </a:rPr>
-              <a:t>ZERO-CODE DOORWAY</a:t>
-            </a:r>
-            <a:endParaRPr lang="en-US" sz="850" dirty="0"/>
-          </a:p>
-        </p:txBody>
-      </p:sp>
-      <p:sp>
-        <p:nvSpPr>
-          <p:cNvPr id="5" name="Text 3"/>
-          <p:cNvSpPr/>
-          <p:nvPr/>
-        </p:nvSpPr>
-        <p:spPr>
-          <a:xfrm>
-            <a:off x="585216" y="1124712"/>
-            <a:ext cx="5852160" cy="1051560"/>
-          </a:xfrm>
-          <a:prstGeom prst="rect">
-            <a:avLst/>
-          </a:prstGeom>
-          <a:noFill/>
-          <a:ln/>
-        </p:spPr>
-        <p:txBody>
-          <a:bodyPr wrap="square" lIns="0" tIns="0" rIns="0" bIns="0" rtlCol="0" anchor="ctr">
-            <a:normAutofit/>
-          </a:bodyPr>
-          <a:lstStyle/>
-          <a:p>
-            <a:pPr indent="0" marL="0">
-              <a:buNone/>
-            </a:pPr>
-            <a:r>
-              <a:rPr lang="en-US" sz="3100" b="1" dirty="0">
-                <a:solidFill>
-                  <a:srgbClr val="0B1628"/>
-                </a:solidFill>
-                <a:latin typeface="Helvetica Neue" pitchFamily="34" charset="0"/>
-                <a:ea typeface="Helvetica Neue" pitchFamily="34" charset="-122"/>
-                <a:cs typeface="Helvetica Neue" pitchFamily="34" charset="-120"/>
-              </a:rPr>
-              <a:t>Application creation opens to everyone.</a:t>
-            </a:r>
-            <a:endParaRPr lang="en-US" sz="3100" dirty="0"/>
-          </a:p>
-        </p:txBody>
-      </p:sp>
-      <p:sp>
-        <p:nvSpPr>
-          <p:cNvPr id="6" name="Text 4"/>
-          <p:cNvSpPr/>
-          <p:nvPr/>
-        </p:nvSpPr>
-        <p:spPr>
-          <a:xfrm>
-            <a:off x="585216" y="2542032"/>
-            <a:ext cx="4937760" cy="1188720"/>
-          </a:xfrm>
-          <a:prstGeom prst="rect">
-            <a:avLst/>
-          </a:prstGeom>
-          <a:noFill/>
-          <a:ln/>
-        </p:spPr>
-        <p:txBody>
-          <a:bodyPr wrap="square" lIns="0" tIns="0" rIns="0" bIns="0" rtlCol="0" anchor="ctr">
-            <a:normAutofit/>
-          </a:bodyPr>
-          <a:lstStyle/>
-          <a:p>
-            <a:pPr indent="0" marL="0">
-              <a:buNone/>
-            </a:pPr>
-            <a:r>
-              <a:rPr lang="en-US" sz="1220" dirty="0">
-                <a:solidFill>
-                  <a:srgbClr val="263A52"/>
-                </a:solidFill>
-                <a:latin typeface="Helvetica Neue" pitchFamily="34" charset="0"/>
-                <a:ea typeface="Helvetica Neue" pitchFamily="34" charset="-122"/>
-                <a:cs typeface="Helvetica Neue" pitchFamily="34" charset="-120"/>
-              </a:rPr>
-              <a:t>Users describe intent, inspect the visual structure, refine components and run the DAG. Code still exists, but it is no longer the only entrance to software creation.</a:t>
-            </a:r>
-            <a:endParaRPr lang="en-US" sz="1220" dirty="0"/>
-          </a:p>
-        </p:txBody>
-      </p:sp>
-      <p:sp>
-        <p:nvSpPr>
-          <p:cNvPr id="7" name="Shape 5"/>
-          <p:cNvSpPr/>
-          <p:nvPr/>
-        </p:nvSpPr>
-        <p:spPr>
-          <a:xfrm>
-            <a:off x="6400800" y="1463040"/>
-            <a:ext cx="5166360" cy="3573071"/>
-          </a:xfrm>
-          <a:prstGeom prst="roundRect">
-            <a:avLst>
-              <a:gd name="adj" fmla="val 1535"/>
-            </a:avLst>
-          </a:prstGeom>
-          <a:solidFill>
-            <a:srgbClr val="FFFFFF"/>
-          </a:solidFill>
-          <a:ln w="12700">
-            <a:solidFill>
-              <a:srgbClr val="DCE6EE"/>
-            </a:solidFill>
-            <a:prstDash val="solid"/>
-          </a:ln>
-        </p:spPr>
-      </p:sp>
-      <p:pic>
-        <p:nvPicPr>
-          <p:cNvPr id="8" name="Image 0" descr="/Users/ivx/Documents/VLC-Marketing/brief/assets/vlc-visual-panel-2026-04-03.png">    </p:cNvPr>
-          <p:cNvPicPr>
-            <a:picLocks noChangeAspect="1"/>
-          </p:cNvPicPr>
-          <p:nvPr/>
-        </p:nvPicPr>
-        <p:blipFill>
-          <a:blip r:embed="rId1"/>
-          <a:stretch>
-            <a:fillRect/>
-          </a:stretch>
-        </p:blipFill>
-        <p:spPr>
-          <a:xfrm>
-            <a:off x="6446520" y="1508760"/>
-            <a:ext cx="5074920" cy="3481631"/>
-          </a:xfrm>
-          <a:prstGeom prst="rect">
-            <a:avLst/>
-          </a:prstGeom>
-        </p:spPr>
-      </p:pic>
-      <p:sp>
-        <p:nvSpPr>
-          <p:cNvPr id="9" name="Shape 6"/>
-          <p:cNvSpPr/>
-          <p:nvPr/>
-        </p:nvSpPr>
-        <p:spPr>
-          <a:xfrm>
-            <a:off x="585216" y="6327648"/>
-            <a:ext cx="11021263" cy="0"/>
-          </a:xfrm>
-          <a:prstGeom prst="line">
-            <a:avLst/>
-          </a:prstGeom>
-          <a:noFill/>
-          <a:ln w="12700">
-            <a:solidFill>
-              <a:srgbClr val="DCE6EE"/>
-            </a:solidFill>
-            <a:prstDash val="solid"/>
-          </a:ln>
-        </p:spPr>
-      </p:sp>
-      <p:sp>
-        <p:nvSpPr>
-          <p:cNvPr id="10" name="Text 7"/>
-          <p:cNvSpPr/>
-          <p:nvPr/>
-        </p:nvSpPr>
-        <p:spPr>
-          <a:xfrm>
-            <a:off x="585216" y="6419088"/>
-            <a:ext cx="3840480" cy="201168"/>
-          </a:xfrm>
-          <a:prstGeom prst="rect">
-            <a:avLst/>
-          </a:prstGeom>
-          <a:noFill/>
-          <a:ln/>
-        </p:spPr>
-        <p:txBody>
-          <a:bodyPr wrap="square" lIns="0" tIns="0" rIns="0" bIns="0" rtlCol="0" anchor="ctr"/>
-          <a:lstStyle/>
-          <a:p>
-            <a:pPr indent="0" marL="0">
-              <a:buNone/>
-            </a:pPr>
-            <a:r>
-              <a:rPr lang="en-US" sz="820" dirty="0">
-                <a:solidFill>
-                  <a:srgbClr val="6B7A90"/>
-                </a:solidFill>
-                <a:latin typeface="Helvetica Neue" pitchFamily="34" charset="0"/>
-                <a:ea typeface="Helvetica Neue" pitchFamily="34" charset="-122"/>
-                <a:cs typeface="Helvetica Neue" pitchFamily="34" charset="-120"/>
-              </a:rPr>
-              <a:t>VL-Code · Local AI-native IDE</a:t>
-            </a:r>
-            <a:endParaRPr lang="en-US" sz="820" dirty="0"/>
-          </a:p>
-        </p:txBody>
-      </p:sp>
-      <p:sp>
-        <p:nvSpPr>
-          <p:cNvPr id="11" name="Text 8"/>
-          <p:cNvSpPr/>
-          <p:nvPr/>
-        </p:nvSpPr>
-        <p:spPr>
-          <a:xfrm>
-            <a:off x="7491679" y="6419088"/>
-            <a:ext cx="4114800" cy="201168"/>
-          </a:xfrm>
-          <a:prstGeom prst="rect">
-            <a:avLst/>
-          </a:prstGeom>
-          <a:noFill/>
-          <a:ln/>
-        </p:spPr>
-        <p:txBody>
-          <a:bodyPr wrap="square" lIns="0" tIns="0" rIns="0" bIns="0" rtlCol="0" anchor="ctr"/>
-          <a:lstStyle/>
-          <a:p>
-            <a:pPr algn="r" indent="0" marL="0">
-              <a:buNone/>
-            </a:pPr>
-            <a:r>
-              <a:rPr lang="en-US" sz="820" dirty="0">
-                <a:solidFill>
-                  <a:srgbClr val="6B7A90"/>
-                </a:solidFill>
-                <a:latin typeface="Helvetica Neue" pitchFamily="34" charset="0"/>
-                <a:ea typeface="Helvetica Neue" pitchFamily="34" charset="-122"/>
-                <a:cs typeface="Helvetica Neue" pitchFamily="34" charset="-120"/>
-              </a:rPr>
-              <a:t>github.com/VisualLogic-AI/VL-Code</a:t>
-            </a:r>
-            <a:endParaRPr lang="en-US" sz="820" dirty="0"/>
           </a:p>
         </p:txBody>
       </p:sp>
@@ -4695,7 +6247,7 @@
                 <a:ea typeface="Helvetica Neue" pitchFamily="34" charset="-122"/>
                 <a:cs typeface="Helvetica Neue" pitchFamily="34" charset="-120"/>
               </a:rPr>
-              <a:t>13</a:t>
+              <a:t>12</a:t>
             </a:r>
             <a:endParaRPr lang="en-US" sz="850" dirty="0"/>
           </a:p>
@@ -4734,7 +6286,7 @@
                 <a:ea typeface="Helvetica Neue" pitchFamily="34" charset="-122"/>
                 <a:cs typeface="Helvetica Neue" pitchFamily="34" charset="-120"/>
               </a:rPr>
-              <a:t>OPEN RESOURCES</a:t>
+              <a:t>ZERO-CODE DOORWAY</a:t>
             </a:r>
             <a:endParaRPr lang="en-US" sz="850" dirty="0"/>
           </a:p>
@@ -4775,7 +6327,7 @@
                 <a:ea typeface="Helvetica Neue" pitchFamily="34" charset="-122"/>
                 <a:cs typeface="Helvetica Neue" pitchFamily="34" charset="-120"/>
               </a:rPr>
-              <a:t>Developers can bring their own building blocks.</a:t>
+              <a:t>Application creation opens to everyone.</a:t>
             </a:r>
             <a:endParaRPr lang="en-US" sz="3100" dirty="0"/>
           </a:p>
@@ -4816,7 +6368,7 @@
                 <a:ea typeface="Helvetica Neue" pitchFamily="34" charset="-122"/>
                 <a:cs typeface="Helvetica Neue" pitchFamily="34" charset="-120"/>
               </a:rPr>
-              <a:t>Workflows, documents, tools, components, skills and themes can be uploaded, shared, searched and reused. VLC is an open resource layer, not a closed agent box.</a:t>
+              <a:t>Users describe intent, inspect the visual structure, refine components and run the DAG. Code still exists, but it is no longer the only entrance to software creation.</a:t>
             </a:r>
             <a:endParaRPr lang="en-US" sz="1220" dirty="0"/>
           </a:p>
@@ -4830,113 +6382,12 @@
         </p:nvSpPr>
         <p:spPr>
           <a:xfrm>
-            <a:off x="585216" y="6327648"/>
-            <a:ext cx="11021263" cy="0"/>
-          </a:xfrm>
-          <a:prstGeom prst="line">
-            <a:avLst/>
-          </a:prstGeom>
-          <a:noFill/>
-          <a:ln w="12700">
-            <a:solidFill>
-              <a:srgbClr val="DCE6EE"/>
-            </a:solidFill>
-            <a:prstDash val="solid"/>
-          </a:ln>
-        </p:spPr>
-      </p:sp>
-      <p:sp>
-        <p:nvSpPr>
-          <p:cNvPr id="8" name="Text 6"/>
-          <p:cNvSpPr/>
-          <p:nvPr/>
-        </p:nvSpPr>
-        <p:spPr>
-          <a:xfrm>
-            <a:off x="585216" y="6419088"/>
-            <a:ext cx="3840480" cy="201168"/>
-          </a:xfrm>
-          <a:prstGeom prst="rect">
-            <a:avLst/>
-          </a:prstGeom>
-          <a:noFill/>
-          <a:ln/>
-        </p:spPr>
-        <p:txBody>
-          <a:bodyPr wrap="square" lIns="0" tIns="0" rIns="0" bIns="0" rtlCol="0" anchor="ctr"/>
-          <a:lstStyle/>
-          <a:p>
-            <a:pPr indent="0" marL="0">
-              <a:buNone/>
-            </a:pPr>
-            <a:r>
-              <a:rPr lang="en-US" sz="820" dirty="0">
-                <a:solidFill>
-                  <a:srgbClr val="6B7A90"/>
-                </a:solidFill>
-                <a:latin typeface="Helvetica Neue" pitchFamily="34" charset="0"/>
-                <a:ea typeface="Helvetica Neue" pitchFamily="34" charset="-122"/>
-                <a:cs typeface="Helvetica Neue" pitchFamily="34" charset="-120"/>
-              </a:rPr>
-              <a:t>VL-Code · Local AI-native IDE</a:t>
-            </a:r>
-            <a:endParaRPr lang="en-US" sz="820" dirty="0"/>
-          </a:p>
-        </p:txBody>
-      </p:sp>
-      <p:sp>
-        <p:nvSpPr>
-          <p:cNvPr id="9" name="Text 7"/>
-          <p:cNvSpPr/>
-          <p:nvPr/>
-        </p:nvSpPr>
-        <p:spPr>
-          <a:xfrm>
-            <a:off x="7491679" y="6419088"/>
-            <a:ext cx="4114800" cy="201168"/>
-          </a:xfrm>
-          <a:prstGeom prst="rect">
-            <a:avLst/>
-          </a:prstGeom>
-          <a:noFill/>
-          <a:ln/>
-        </p:spPr>
-        <p:txBody>
-          <a:bodyPr wrap="square" lIns="0" tIns="0" rIns="0" bIns="0" rtlCol="0" anchor="ctr"/>
-          <a:lstStyle/>
-          <a:p>
-            <a:pPr algn="r" indent="0" marL="0">
-              <a:buNone/>
-            </a:pPr>
-            <a:r>
-              <a:rPr lang="en-US" sz="820" dirty="0">
-                <a:solidFill>
-                  <a:srgbClr val="6B7A90"/>
-                </a:solidFill>
-                <a:latin typeface="Helvetica Neue" pitchFamily="34" charset="0"/>
-                <a:ea typeface="Helvetica Neue" pitchFamily="34" charset="-122"/>
-                <a:cs typeface="Helvetica Neue" pitchFamily="34" charset="-120"/>
-              </a:rPr>
-              <a:t>github.com/VisualLogic-AI/VL-Code</a:t>
-            </a:r>
-            <a:endParaRPr lang="en-US" sz="820" dirty="0"/>
-          </a:p>
-        </p:txBody>
-      </p:sp>
-      <p:sp>
-        <p:nvSpPr>
-          <p:cNvPr id="10" name="Shape 8"/>
-          <p:cNvSpPr/>
-          <p:nvPr/>
-        </p:nvSpPr>
-        <p:spPr>
-          <a:xfrm>
-            <a:off x="6309360" y="2011680"/>
-            <a:ext cx="1133856" cy="621792"/>
+            <a:off x="6400800" y="1463040"/>
+            <a:ext cx="5166360" cy="3573071"/>
           </a:xfrm>
           <a:prstGeom prst="roundRect">
             <a:avLst>
-              <a:gd name="adj" fmla="val 8824"/>
+              <a:gd name="adj" fmla="val 1535"/>
             </a:avLst>
           </a:prstGeom>
           <a:solidFill>
@@ -4950,66 +6401,45 @@
           </a:ln>
         </p:spPr>
       </p:sp>
-      <p:sp>
-        <p:nvSpPr>
-          <p:cNvPr id="11" name="Text 9"/>
-          <p:cNvSpPr/>
-          <p:nvPr/>
-        </p:nvSpPr>
-        <p:spPr>
-          <a:xfrm>
-            <a:off x="6382512" y="2249424"/>
-            <a:ext cx="987552" cy="91440"/>
-          </a:xfrm>
-          <a:prstGeom prst="rect">
-            <a:avLst/>
-          </a:prstGeom>
-          <a:noFill/>
-          <a:ln/>
-        </p:spPr>
-        <p:txBody>
-          <a:bodyPr wrap="square" lIns="0" tIns="0" rIns="0" bIns="0" rtlCol="0" anchor="ctr">
-            <a:normAutofit/>
-          </a:bodyPr>
-          <a:lstStyle/>
-          <a:p>
-            <a:pPr algn="ctr" indent="0" marL="0">
-              <a:buNone/>
-            </a:pPr>
-            <a:r>
-              <a:rPr lang="en-US" sz="820" b="1" dirty="0">
-                <a:solidFill>
-                  <a:srgbClr val="0B1628"/>
-                </a:solidFill>
-                <a:latin typeface="Helvetica Neue" pitchFamily="34" charset="0"/>
-                <a:ea typeface="Helvetica Neue" pitchFamily="34" charset="-122"/>
-                <a:cs typeface="Helvetica Neue" pitchFamily="34" charset="-120"/>
-              </a:rPr>
-              <a:t>Workflows / DAGs</a:t>
-            </a:r>
-            <a:endParaRPr lang="en-US" sz="820" dirty="0"/>
-          </a:p>
-        </p:txBody>
-      </p:sp>
-      <p:sp>
-        <p:nvSpPr>
-          <p:cNvPr id="12" name="Shape 10"/>
-          <p:cNvSpPr/>
-          <p:nvPr/>
-        </p:nvSpPr>
-        <p:spPr>
-          <a:xfrm>
-            <a:off x="7754112" y="2011680"/>
-            <a:ext cx="1133856" cy="621792"/>
-          </a:xfrm>
-          <a:prstGeom prst="roundRect">
-            <a:avLst>
-              <a:gd name="adj" fmla="val 8824"/>
-            </a:avLst>
-          </a:prstGeom>
-          <a:solidFill>
-            <a:srgbClr val="FFFFFF"/>
-          </a:solidFill>
+      <p:pic>
+        <p:nvPicPr>
+          <p:cNvPr id="8" name="Image 0" descr="/Users/ivx/Documents/VLC-Marketing/brief/assets/vlc-visual-panel-2026-04-03.png">    </p:cNvPr>
+          <p:cNvPicPr>
+            <a:picLocks noChangeAspect="1"/>
+          </p:cNvPicPr>
+          <p:nvPr/>
+        </p:nvPicPr>
+        <p:blipFill>
+          <a:blip r:embed="rId1"/>
+          <a:stretch>
+            <a:fillRect/>
+          </a:stretch>
+        </p:blipFill>
+        <p:spPr>
+          <a:xfrm>
+            <a:off x="6446520" y="1508760"/>
+            <a:ext cx="5074920" cy="3481631"/>
+          </a:xfrm>
+          <a:prstGeom prst="rect">
+            <a:avLst/>
+          </a:prstGeom>
+        </p:spPr>
+      </p:pic>
+      <p:sp>
+        <p:nvSpPr>
+          <p:cNvPr id="9" name="Shape 6"/>
+          <p:cNvSpPr/>
+          <p:nvPr/>
+        </p:nvSpPr>
+        <p:spPr>
+          <a:xfrm>
+            <a:off x="585216" y="6327648"/>
+            <a:ext cx="11021263" cy="0"/>
+          </a:xfrm>
+          <a:prstGeom prst="line">
+            <a:avLst/>
+          </a:prstGeom>
+          <a:noFill/>
           <a:ln w="12700">
             <a:solidFill>
               <a:srgbClr val="DCE6EE"/>
@@ -5020,40 +6450,38 @@
       </p:sp>
       <p:sp>
         <p:nvSpPr>
-          <p:cNvPr id="13" name="Text 11"/>
-          <p:cNvSpPr/>
-          <p:nvPr/>
-        </p:nvSpPr>
-        <p:spPr>
-          <a:xfrm>
-            <a:off x="7827264" y="2249424"/>
-            <a:ext cx="987552" cy="91440"/>
-          </a:xfrm>
-          <a:prstGeom prst="rect">
-            <a:avLst/>
-          </a:prstGeom>
-          <a:noFill/>
-          <a:ln/>
-        </p:spPr>
-        <p:txBody>
-          <a:bodyPr wrap="square" lIns="0" tIns="0" rIns="0" bIns="0" rtlCol="0" anchor="ctr">
-            <a:normAutofit/>
-          </a:bodyPr>
-          <a:lstStyle/>
-          <a:p>
-            <a:pPr algn="ctr" indent="0" marL="0">
-              <a:buNone/>
-            </a:pPr>
-            <a:r>
-              <a:rPr lang="en-US" sz="820" b="1" dirty="0">
-                <a:solidFill>
-                  <a:srgbClr val="0B1628"/>
-                </a:solidFill>
-                <a:latin typeface="Helvetica Neue" pitchFamily="34" charset="0"/>
-                <a:ea typeface="Helvetica Neue" pitchFamily="34" charset="-122"/>
-                <a:cs typeface="Helvetica Neue" pitchFamily="34" charset="-120"/>
-              </a:rPr>
-              <a:t>Docs</a:t>
+          <p:cNvPr id="10" name="Text 7"/>
+          <p:cNvSpPr/>
+          <p:nvPr/>
+        </p:nvSpPr>
+        <p:spPr>
+          <a:xfrm>
+            <a:off x="585216" y="6419088"/>
+            <a:ext cx="3840480" cy="201168"/>
+          </a:xfrm>
+          <a:prstGeom prst="rect">
+            <a:avLst/>
+          </a:prstGeom>
+          <a:noFill/>
+          <a:ln/>
+        </p:spPr>
+        <p:txBody>
+          <a:bodyPr wrap="square" lIns="0" tIns="0" rIns="0" bIns="0" rtlCol="0" anchor="ctr"/>
+          <a:lstStyle/>
+          <a:p>
+            <a:pPr indent="0" marL="0">
+              <a:buNone/>
+            </a:pPr>
+            <a:r>
+              <a:rPr lang="en-US" sz="820" dirty="0">
+                <a:solidFill>
+                  <a:srgbClr val="6B7A90"/>
+                </a:solidFill>
+                <a:latin typeface="Helvetica Neue" pitchFamily="34" charset="0"/>
+                <a:ea typeface="Helvetica Neue" pitchFamily="34" charset="-122"/>
+                <a:cs typeface="Helvetica Neue" pitchFamily="34" charset="-120"/>
+              </a:rPr>
+              <a:t>VL-Code · Local AI-native IDE</a:t>
             </a:r>
             <a:endParaRPr lang="en-US" sz="820" dirty="0"/>
           </a:p>
@@ -5061,341 +6489,40 @@
       </p:sp>
       <p:sp>
         <p:nvSpPr>
-          <p:cNvPr id="14" name="Shape 12"/>
-          <p:cNvSpPr/>
-          <p:nvPr/>
-        </p:nvSpPr>
-        <p:spPr>
-          <a:xfrm>
-            <a:off x="9198864" y="2011680"/>
-            <a:ext cx="1133856" cy="621792"/>
-          </a:xfrm>
-          <a:prstGeom prst="roundRect">
-            <a:avLst>
-              <a:gd name="adj" fmla="val 8824"/>
-            </a:avLst>
-          </a:prstGeom>
-          <a:solidFill>
-            <a:srgbClr val="FFFFFF"/>
-          </a:solidFill>
-          <a:ln w="12700">
-            <a:solidFill>
-              <a:srgbClr val="DCE6EE"/>
-            </a:solidFill>
-            <a:prstDash val="solid"/>
-          </a:ln>
-        </p:spPr>
-      </p:sp>
-      <p:sp>
-        <p:nvSpPr>
-          <p:cNvPr id="15" name="Text 13"/>
-          <p:cNvSpPr/>
-          <p:nvPr/>
-        </p:nvSpPr>
-        <p:spPr>
-          <a:xfrm>
-            <a:off x="9272016" y="2249424"/>
-            <a:ext cx="987552" cy="91440"/>
-          </a:xfrm>
-          <a:prstGeom prst="rect">
-            <a:avLst/>
-          </a:prstGeom>
-          <a:noFill/>
-          <a:ln/>
-        </p:spPr>
-        <p:txBody>
-          <a:bodyPr wrap="square" lIns="0" tIns="0" rIns="0" bIns="0" rtlCol="0" anchor="ctr">
-            <a:normAutofit/>
-          </a:bodyPr>
-          <a:lstStyle/>
-          <a:p>
-            <a:pPr algn="ctr" indent="0" marL="0">
-              <a:buNone/>
-            </a:pPr>
-            <a:r>
-              <a:rPr lang="en-US" sz="820" b="1" dirty="0">
-                <a:solidFill>
-                  <a:srgbClr val="0B1628"/>
-                </a:solidFill>
-                <a:latin typeface="Helvetica Neue" pitchFamily="34" charset="0"/>
-                <a:ea typeface="Helvetica Neue" pitchFamily="34" charset="-122"/>
-                <a:cs typeface="Helvetica Neue" pitchFamily="34" charset="-120"/>
-              </a:rPr>
-              <a:t>Tools</a:t>
+          <p:cNvPr id="11" name="Text 8"/>
+          <p:cNvSpPr/>
+          <p:nvPr/>
+        </p:nvSpPr>
+        <p:spPr>
+          <a:xfrm>
+            <a:off x="7491679" y="6419088"/>
+            <a:ext cx="4114800" cy="201168"/>
+          </a:xfrm>
+          <a:prstGeom prst="rect">
+            <a:avLst/>
+          </a:prstGeom>
+          <a:noFill/>
+          <a:ln/>
+        </p:spPr>
+        <p:txBody>
+          <a:bodyPr wrap="square" lIns="0" tIns="0" rIns="0" bIns="0" rtlCol="0" anchor="ctr"/>
+          <a:lstStyle/>
+          <a:p>
+            <a:pPr algn="r" indent="0" marL="0">
+              <a:buNone/>
+            </a:pPr>
+            <a:r>
+              <a:rPr lang="en-US" sz="820" dirty="0">
+                <a:solidFill>
+                  <a:srgbClr val="6B7A90"/>
+                </a:solidFill>
+                <a:latin typeface="Helvetica Neue" pitchFamily="34" charset="0"/>
+                <a:ea typeface="Helvetica Neue" pitchFamily="34" charset="-122"/>
+                <a:cs typeface="Helvetica Neue" pitchFamily="34" charset="-120"/>
+              </a:rPr>
+              <a:t>github.com/VisualLogic-AI/VL-Code</a:t>
             </a:r>
             <a:endParaRPr lang="en-US" sz="820" dirty="0"/>
-          </a:p>
-        </p:txBody>
-      </p:sp>
-      <p:sp>
-        <p:nvSpPr>
-          <p:cNvPr id="16" name="Shape 14"/>
-          <p:cNvSpPr/>
-          <p:nvPr/>
-        </p:nvSpPr>
-        <p:spPr>
-          <a:xfrm>
-            <a:off x="6309360" y="2971800"/>
-            <a:ext cx="1133856" cy="621792"/>
-          </a:xfrm>
-          <a:prstGeom prst="roundRect">
-            <a:avLst>
-              <a:gd name="adj" fmla="val 8824"/>
-            </a:avLst>
-          </a:prstGeom>
-          <a:solidFill>
-            <a:srgbClr val="FFFFFF"/>
-          </a:solidFill>
-          <a:ln w="12700">
-            <a:solidFill>
-              <a:srgbClr val="DCE6EE"/>
-            </a:solidFill>
-            <a:prstDash val="solid"/>
-          </a:ln>
-        </p:spPr>
-      </p:sp>
-      <p:sp>
-        <p:nvSpPr>
-          <p:cNvPr id="17" name="Text 15"/>
-          <p:cNvSpPr/>
-          <p:nvPr/>
-        </p:nvSpPr>
-        <p:spPr>
-          <a:xfrm>
-            <a:off x="6382512" y="3209544"/>
-            <a:ext cx="987552" cy="91440"/>
-          </a:xfrm>
-          <a:prstGeom prst="rect">
-            <a:avLst/>
-          </a:prstGeom>
-          <a:noFill/>
-          <a:ln/>
-        </p:spPr>
-        <p:txBody>
-          <a:bodyPr wrap="square" lIns="0" tIns="0" rIns="0" bIns="0" rtlCol="0" anchor="ctr">
-            <a:normAutofit/>
-          </a:bodyPr>
-          <a:lstStyle/>
-          <a:p>
-            <a:pPr algn="ctr" indent="0" marL="0">
-              <a:buNone/>
-            </a:pPr>
-            <a:r>
-              <a:rPr lang="en-US" sz="820" b="1" dirty="0">
-                <a:solidFill>
-                  <a:srgbClr val="0B1628"/>
-                </a:solidFill>
-                <a:latin typeface="Helvetica Neue" pitchFamily="34" charset="0"/>
-                <a:ea typeface="Helvetica Neue" pitchFamily="34" charset="-122"/>
-                <a:cs typeface="Helvetica Neue" pitchFamily="34" charset="-120"/>
-              </a:rPr>
-              <a:t>Components</a:t>
-            </a:r>
-            <a:endParaRPr lang="en-US" sz="820" dirty="0"/>
-          </a:p>
-        </p:txBody>
-      </p:sp>
-      <p:sp>
-        <p:nvSpPr>
-          <p:cNvPr id="18" name="Shape 16"/>
-          <p:cNvSpPr/>
-          <p:nvPr/>
-        </p:nvSpPr>
-        <p:spPr>
-          <a:xfrm>
-            <a:off x="7754112" y="2971800"/>
-            <a:ext cx="1133856" cy="621792"/>
-          </a:xfrm>
-          <a:prstGeom prst="roundRect">
-            <a:avLst>
-              <a:gd name="adj" fmla="val 8824"/>
-            </a:avLst>
-          </a:prstGeom>
-          <a:solidFill>
-            <a:srgbClr val="FFFFFF"/>
-          </a:solidFill>
-          <a:ln w="12700">
-            <a:solidFill>
-              <a:srgbClr val="DCE6EE"/>
-            </a:solidFill>
-            <a:prstDash val="solid"/>
-          </a:ln>
-        </p:spPr>
-      </p:sp>
-      <p:sp>
-        <p:nvSpPr>
-          <p:cNvPr id="19" name="Text 17"/>
-          <p:cNvSpPr/>
-          <p:nvPr/>
-        </p:nvSpPr>
-        <p:spPr>
-          <a:xfrm>
-            <a:off x="7827264" y="3209544"/>
-            <a:ext cx="987552" cy="91440"/>
-          </a:xfrm>
-          <a:prstGeom prst="rect">
-            <a:avLst/>
-          </a:prstGeom>
-          <a:noFill/>
-          <a:ln/>
-        </p:spPr>
-        <p:txBody>
-          <a:bodyPr wrap="square" lIns="0" tIns="0" rIns="0" bIns="0" rtlCol="0" anchor="ctr">
-            <a:normAutofit/>
-          </a:bodyPr>
-          <a:lstStyle/>
-          <a:p>
-            <a:pPr algn="ctr" indent="0" marL="0">
-              <a:buNone/>
-            </a:pPr>
-            <a:r>
-              <a:rPr lang="en-US" sz="820" b="1" dirty="0">
-                <a:solidFill>
-                  <a:srgbClr val="0B1628"/>
-                </a:solidFill>
-                <a:latin typeface="Helvetica Neue" pitchFamily="34" charset="0"/>
-                <a:ea typeface="Helvetica Neue" pitchFamily="34" charset="-122"/>
-                <a:cs typeface="Helvetica Neue" pitchFamily="34" charset="-120"/>
-              </a:rPr>
-              <a:t>Skills</a:t>
-            </a:r>
-            <a:endParaRPr lang="en-US" sz="820" dirty="0"/>
-          </a:p>
-        </p:txBody>
-      </p:sp>
-      <p:sp>
-        <p:nvSpPr>
-          <p:cNvPr id="20" name="Shape 18"/>
-          <p:cNvSpPr/>
-          <p:nvPr/>
-        </p:nvSpPr>
-        <p:spPr>
-          <a:xfrm>
-            <a:off x="9198864" y="2971800"/>
-            <a:ext cx="1133856" cy="621792"/>
-          </a:xfrm>
-          <a:prstGeom prst="roundRect">
-            <a:avLst>
-              <a:gd name="adj" fmla="val 8824"/>
-            </a:avLst>
-          </a:prstGeom>
-          <a:solidFill>
-            <a:srgbClr val="FFFFFF"/>
-          </a:solidFill>
-          <a:ln w="12700">
-            <a:solidFill>
-              <a:srgbClr val="DCE6EE"/>
-            </a:solidFill>
-            <a:prstDash val="solid"/>
-          </a:ln>
-        </p:spPr>
-      </p:sp>
-      <p:sp>
-        <p:nvSpPr>
-          <p:cNvPr id="21" name="Text 19"/>
-          <p:cNvSpPr/>
-          <p:nvPr/>
-        </p:nvSpPr>
-        <p:spPr>
-          <a:xfrm>
-            <a:off x="9272016" y="3209544"/>
-            <a:ext cx="987552" cy="91440"/>
-          </a:xfrm>
-          <a:prstGeom prst="rect">
-            <a:avLst/>
-          </a:prstGeom>
-          <a:noFill/>
-          <a:ln/>
-        </p:spPr>
-        <p:txBody>
-          <a:bodyPr wrap="square" lIns="0" tIns="0" rIns="0" bIns="0" rtlCol="0" anchor="ctr">
-            <a:normAutofit/>
-          </a:bodyPr>
-          <a:lstStyle/>
-          <a:p>
-            <a:pPr algn="ctr" indent="0" marL="0">
-              <a:buNone/>
-            </a:pPr>
-            <a:r>
-              <a:rPr lang="en-US" sz="820" b="1" dirty="0">
-                <a:solidFill>
-                  <a:srgbClr val="0B1628"/>
-                </a:solidFill>
-                <a:latin typeface="Helvetica Neue" pitchFamily="34" charset="0"/>
-                <a:ea typeface="Helvetica Neue" pitchFamily="34" charset="-122"/>
-                <a:cs typeface="Helvetica Neue" pitchFamily="34" charset="-120"/>
-              </a:rPr>
-              <a:t>Themes</a:t>
-            </a:r>
-            <a:endParaRPr lang="en-US" sz="820" dirty="0"/>
-          </a:p>
-        </p:txBody>
-      </p:sp>
-      <p:sp>
-        <p:nvSpPr>
-          <p:cNvPr id="22" name="Shape 20"/>
-          <p:cNvSpPr/>
-          <p:nvPr/>
-        </p:nvSpPr>
-        <p:spPr>
-          <a:xfrm>
-            <a:off x="6309360" y="4315968"/>
-            <a:ext cx="4069080" cy="320040"/>
-          </a:xfrm>
-          <a:prstGeom prst="roundRect">
-            <a:avLst>
-              <a:gd name="adj" fmla="val 17143"/>
-            </a:avLst>
-          </a:prstGeom>
-          <a:solidFill>
-            <a:srgbClr val="EEF4F8"/>
-          </a:solidFill>
-          <a:ln w="12700">
-            <a:solidFill>
-              <a:srgbClr val="DCE6EE"/>
-            </a:solidFill>
-            <a:prstDash val="solid"/>
-          </a:ln>
-        </p:spPr>
-      </p:sp>
-      <p:sp>
-        <p:nvSpPr>
-          <p:cNvPr id="23" name="Text 21"/>
-          <p:cNvSpPr/>
-          <p:nvPr/>
-        </p:nvSpPr>
-        <p:spPr>
-          <a:xfrm>
-            <a:off x="6309360" y="4407408"/>
-            <a:ext cx="4069080" cy="109728"/>
-          </a:xfrm>
-          <a:prstGeom prst="rect">
-            <a:avLst/>
-          </a:prstGeom>
-          <a:noFill/>
-          <a:ln/>
-        </p:spPr>
-        <p:txBody>
-          <a:bodyPr wrap="square" lIns="0" tIns="0" rIns="0" bIns="0" rtlCol="0" anchor="ctr">
-            <a:normAutofit/>
-          </a:bodyPr>
-          <a:lstStyle/>
-          <a:p>
-            <a:pPr algn="ctr" indent="0" marL="0">
-              <a:buNone/>
-            </a:pPr>
-            <a:r>
-              <a:rPr lang="en-US" sz="780" b="1" dirty="0">
-                <a:solidFill>
-                  <a:srgbClr val="14B8A6"/>
-                </a:solidFill>
-                <a:latin typeface="Helvetica Neue" pitchFamily="34" charset="0"/>
-                <a:ea typeface="Helvetica Neue" pitchFamily="34" charset="-122"/>
-                <a:cs typeface="Helvetica Neue" pitchFamily="34" charset="-120"/>
-              </a:rPr>
-              <a:t>Resources can be uploaded, searched, reused and consumed by DAGs</a:t>
-            </a:r>
-            <a:endParaRPr lang="en-US" sz="780" dirty="0"/>
           </a:p>
         </p:txBody>
       </p:sp>
@@ -5489,6 +6616,800 @@
                 <a:ea typeface="Helvetica Neue" pitchFamily="34" charset="-122"/>
                 <a:cs typeface="Helvetica Neue" pitchFamily="34" charset="-120"/>
               </a:rPr>
+              <a:t>13</a:t>
+            </a:r>
+            <a:endParaRPr lang="en-US" sz="850" dirty="0"/>
+          </a:p>
+        </p:txBody>
+      </p:sp>
+      <p:sp>
+        <p:nvSpPr>
+          <p:cNvPr id="4" name="Text 2"/>
+          <p:cNvSpPr/>
+          <p:nvPr/>
+        </p:nvSpPr>
+        <p:spPr>
+          <a:xfrm>
+            <a:off x="1115568" y="612648"/>
+            <a:ext cx="4023360" cy="146304"/>
+          </a:xfrm>
+          <a:prstGeom prst="rect">
+            <a:avLst/>
+          </a:prstGeom>
+          <a:noFill/>
+          <a:ln/>
+        </p:spPr>
+        <p:txBody>
+          <a:bodyPr wrap="square" lIns="0" tIns="0" rIns="0" bIns="0" rtlCol="0" anchor="ctr"/>
+          <a:lstStyle/>
+          <a:p>
+            <a:pPr indent="0" marL="0">
+              <a:buNone/>
+            </a:pPr>
+            <a:r>
+              <a:rPr lang="en-US" sz="850" b="1" dirty="0">
+                <a:solidFill>
+                  <a:srgbClr val="14B8A6"/>
+                </a:solidFill>
+                <a:latin typeface="Helvetica Neue" pitchFamily="34" charset="0"/>
+                <a:ea typeface="Helvetica Neue" pitchFamily="34" charset="-122"/>
+                <a:cs typeface="Helvetica Neue" pitchFamily="34" charset="-120"/>
+              </a:rPr>
+              <a:t>OPEN RESOURCES</a:t>
+            </a:r>
+            <a:endParaRPr lang="en-US" sz="850" dirty="0"/>
+          </a:p>
+        </p:txBody>
+      </p:sp>
+      <p:sp>
+        <p:nvSpPr>
+          <p:cNvPr id="5" name="Text 3"/>
+          <p:cNvSpPr/>
+          <p:nvPr/>
+        </p:nvSpPr>
+        <p:spPr>
+          <a:xfrm>
+            <a:off x="585216" y="1124712"/>
+            <a:ext cx="5852160" cy="1051560"/>
+          </a:xfrm>
+          <a:prstGeom prst="rect">
+            <a:avLst/>
+          </a:prstGeom>
+          <a:noFill/>
+          <a:ln/>
+        </p:spPr>
+        <p:txBody>
+          <a:bodyPr wrap="square" lIns="0" tIns="0" rIns="0" bIns="0" rtlCol="0" anchor="ctr">
+            <a:normAutofit/>
+          </a:bodyPr>
+          <a:lstStyle/>
+          <a:p>
+            <a:pPr indent="0" marL="0">
+              <a:buNone/>
+            </a:pPr>
+            <a:r>
+              <a:rPr lang="en-US" sz="3100" b="1" dirty="0">
+                <a:solidFill>
+                  <a:srgbClr val="0B1628"/>
+                </a:solidFill>
+                <a:latin typeface="Helvetica Neue" pitchFamily="34" charset="0"/>
+                <a:ea typeface="Helvetica Neue" pitchFamily="34" charset="-122"/>
+                <a:cs typeface="Helvetica Neue" pitchFamily="34" charset="-120"/>
+              </a:rPr>
+              <a:t>Developers can bring their own building blocks.</a:t>
+            </a:r>
+            <a:endParaRPr lang="en-US" sz="3100" dirty="0"/>
+          </a:p>
+        </p:txBody>
+      </p:sp>
+      <p:sp>
+        <p:nvSpPr>
+          <p:cNvPr id="6" name="Text 4"/>
+          <p:cNvSpPr/>
+          <p:nvPr/>
+        </p:nvSpPr>
+        <p:spPr>
+          <a:xfrm>
+            <a:off x="585216" y="2542032"/>
+            <a:ext cx="4937760" cy="1188720"/>
+          </a:xfrm>
+          <a:prstGeom prst="rect">
+            <a:avLst/>
+          </a:prstGeom>
+          <a:noFill/>
+          <a:ln/>
+        </p:spPr>
+        <p:txBody>
+          <a:bodyPr wrap="square" lIns="0" tIns="0" rIns="0" bIns="0" rtlCol="0" anchor="ctr">
+            <a:normAutofit/>
+          </a:bodyPr>
+          <a:lstStyle/>
+          <a:p>
+            <a:pPr indent="0" marL="0">
+              <a:buNone/>
+            </a:pPr>
+            <a:r>
+              <a:rPr lang="en-US" sz="1220" dirty="0">
+                <a:solidFill>
+                  <a:srgbClr val="263A52"/>
+                </a:solidFill>
+                <a:latin typeface="Helvetica Neue" pitchFamily="34" charset="0"/>
+                <a:ea typeface="Helvetica Neue" pitchFamily="34" charset="-122"/>
+                <a:cs typeface="Helvetica Neue" pitchFamily="34" charset="-120"/>
+              </a:rPr>
+              <a:t>Workflows, documents, tools, components, skills and themes can be uploaded, shared, searched and reused. VLC is an open resource layer, not a closed agent box.</a:t>
+            </a:r>
+            <a:endParaRPr lang="en-US" sz="1220" dirty="0"/>
+          </a:p>
+        </p:txBody>
+      </p:sp>
+      <p:sp>
+        <p:nvSpPr>
+          <p:cNvPr id="7" name="Shape 5"/>
+          <p:cNvSpPr/>
+          <p:nvPr/>
+        </p:nvSpPr>
+        <p:spPr>
+          <a:xfrm>
+            <a:off x="585216" y="6327648"/>
+            <a:ext cx="11021263" cy="0"/>
+          </a:xfrm>
+          <a:prstGeom prst="line">
+            <a:avLst/>
+          </a:prstGeom>
+          <a:noFill/>
+          <a:ln w="12700">
+            <a:solidFill>
+              <a:srgbClr val="DCE6EE"/>
+            </a:solidFill>
+            <a:prstDash val="solid"/>
+          </a:ln>
+        </p:spPr>
+      </p:sp>
+      <p:sp>
+        <p:nvSpPr>
+          <p:cNvPr id="8" name="Text 6"/>
+          <p:cNvSpPr/>
+          <p:nvPr/>
+        </p:nvSpPr>
+        <p:spPr>
+          <a:xfrm>
+            <a:off x="585216" y="6419088"/>
+            <a:ext cx="3840480" cy="201168"/>
+          </a:xfrm>
+          <a:prstGeom prst="rect">
+            <a:avLst/>
+          </a:prstGeom>
+          <a:noFill/>
+          <a:ln/>
+        </p:spPr>
+        <p:txBody>
+          <a:bodyPr wrap="square" lIns="0" tIns="0" rIns="0" bIns="0" rtlCol="0" anchor="ctr"/>
+          <a:lstStyle/>
+          <a:p>
+            <a:pPr indent="0" marL="0">
+              <a:buNone/>
+            </a:pPr>
+            <a:r>
+              <a:rPr lang="en-US" sz="820" dirty="0">
+                <a:solidFill>
+                  <a:srgbClr val="6B7A90"/>
+                </a:solidFill>
+                <a:latin typeface="Helvetica Neue" pitchFamily="34" charset="0"/>
+                <a:ea typeface="Helvetica Neue" pitchFamily="34" charset="-122"/>
+                <a:cs typeface="Helvetica Neue" pitchFamily="34" charset="-120"/>
+              </a:rPr>
+              <a:t>VL-Code · Local AI-native IDE</a:t>
+            </a:r>
+            <a:endParaRPr lang="en-US" sz="820" dirty="0"/>
+          </a:p>
+        </p:txBody>
+      </p:sp>
+      <p:sp>
+        <p:nvSpPr>
+          <p:cNvPr id="9" name="Text 7"/>
+          <p:cNvSpPr/>
+          <p:nvPr/>
+        </p:nvSpPr>
+        <p:spPr>
+          <a:xfrm>
+            <a:off x="7491679" y="6419088"/>
+            <a:ext cx="4114800" cy="201168"/>
+          </a:xfrm>
+          <a:prstGeom prst="rect">
+            <a:avLst/>
+          </a:prstGeom>
+          <a:noFill/>
+          <a:ln/>
+        </p:spPr>
+        <p:txBody>
+          <a:bodyPr wrap="square" lIns="0" tIns="0" rIns="0" bIns="0" rtlCol="0" anchor="ctr"/>
+          <a:lstStyle/>
+          <a:p>
+            <a:pPr algn="r" indent="0" marL="0">
+              <a:buNone/>
+            </a:pPr>
+            <a:r>
+              <a:rPr lang="en-US" sz="820" dirty="0">
+                <a:solidFill>
+                  <a:srgbClr val="6B7A90"/>
+                </a:solidFill>
+                <a:latin typeface="Helvetica Neue" pitchFamily="34" charset="0"/>
+                <a:ea typeface="Helvetica Neue" pitchFamily="34" charset="-122"/>
+                <a:cs typeface="Helvetica Neue" pitchFamily="34" charset="-120"/>
+              </a:rPr>
+              <a:t>github.com/VisualLogic-AI/VL-Code</a:t>
+            </a:r>
+            <a:endParaRPr lang="en-US" sz="820" dirty="0"/>
+          </a:p>
+        </p:txBody>
+      </p:sp>
+      <p:sp>
+        <p:nvSpPr>
+          <p:cNvPr id="10" name="Shape 8"/>
+          <p:cNvSpPr/>
+          <p:nvPr/>
+        </p:nvSpPr>
+        <p:spPr>
+          <a:xfrm>
+            <a:off x="6309360" y="2011680"/>
+            <a:ext cx="1133856" cy="621792"/>
+          </a:xfrm>
+          <a:prstGeom prst="roundRect">
+            <a:avLst>
+              <a:gd name="adj" fmla="val 8824"/>
+            </a:avLst>
+          </a:prstGeom>
+          <a:solidFill>
+            <a:srgbClr val="FFFFFF"/>
+          </a:solidFill>
+          <a:ln w="12700">
+            <a:solidFill>
+              <a:srgbClr val="DCE6EE"/>
+            </a:solidFill>
+            <a:prstDash val="solid"/>
+          </a:ln>
+        </p:spPr>
+      </p:sp>
+      <p:sp>
+        <p:nvSpPr>
+          <p:cNvPr id="11" name="Text 9"/>
+          <p:cNvSpPr/>
+          <p:nvPr/>
+        </p:nvSpPr>
+        <p:spPr>
+          <a:xfrm>
+            <a:off x="6382512" y="2249424"/>
+            <a:ext cx="987552" cy="91440"/>
+          </a:xfrm>
+          <a:prstGeom prst="rect">
+            <a:avLst/>
+          </a:prstGeom>
+          <a:noFill/>
+          <a:ln/>
+        </p:spPr>
+        <p:txBody>
+          <a:bodyPr wrap="square" lIns="0" tIns="0" rIns="0" bIns="0" rtlCol="0" anchor="ctr">
+            <a:normAutofit/>
+          </a:bodyPr>
+          <a:lstStyle/>
+          <a:p>
+            <a:pPr algn="ctr" indent="0" marL="0">
+              <a:buNone/>
+            </a:pPr>
+            <a:r>
+              <a:rPr lang="en-US" sz="820" b="1" dirty="0">
+                <a:solidFill>
+                  <a:srgbClr val="0B1628"/>
+                </a:solidFill>
+                <a:latin typeface="Helvetica Neue" pitchFamily="34" charset="0"/>
+                <a:ea typeface="Helvetica Neue" pitchFamily="34" charset="-122"/>
+                <a:cs typeface="Helvetica Neue" pitchFamily="34" charset="-120"/>
+              </a:rPr>
+              <a:t>Workflows / DAGs</a:t>
+            </a:r>
+            <a:endParaRPr lang="en-US" sz="820" dirty="0"/>
+          </a:p>
+        </p:txBody>
+      </p:sp>
+      <p:sp>
+        <p:nvSpPr>
+          <p:cNvPr id="12" name="Shape 10"/>
+          <p:cNvSpPr/>
+          <p:nvPr/>
+        </p:nvSpPr>
+        <p:spPr>
+          <a:xfrm>
+            <a:off x="7754112" y="2011680"/>
+            <a:ext cx="1133856" cy="621792"/>
+          </a:xfrm>
+          <a:prstGeom prst="roundRect">
+            <a:avLst>
+              <a:gd name="adj" fmla="val 8824"/>
+            </a:avLst>
+          </a:prstGeom>
+          <a:solidFill>
+            <a:srgbClr val="FFFFFF"/>
+          </a:solidFill>
+          <a:ln w="12700">
+            <a:solidFill>
+              <a:srgbClr val="DCE6EE"/>
+            </a:solidFill>
+            <a:prstDash val="solid"/>
+          </a:ln>
+        </p:spPr>
+      </p:sp>
+      <p:sp>
+        <p:nvSpPr>
+          <p:cNvPr id="13" name="Text 11"/>
+          <p:cNvSpPr/>
+          <p:nvPr/>
+        </p:nvSpPr>
+        <p:spPr>
+          <a:xfrm>
+            <a:off x="7827264" y="2249424"/>
+            <a:ext cx="987552" cy="91440"/>
+          </a:xfrm>
+          <a:prstGeom prst="rect">
+            <a:avLst/>
+          </a:prstGeom>
+          <a:noFill/>
+          <a:ln/>
+        </p:spPr>
+        <p:txBody>
+          <a:bodyPr wrap="square" lIns="0" tIns="0" rIns="0" bIns="0" rtlCol="0" anchor="ctr">
+            <a:normAutofit/>
+          </a:bodyPr>
+          <a:lstStyle/>
+          <a:p>
+            <a:pPr algn="ctr" indent="0" marL="0">
+              <a:buNone/>
+            </a:pPr>
+            <a:r>
+              <a:rPr lang="en-US" sz="820" b="1" dirty="0">
+                <a:solidFill>
+                  <a:srgbClr val="0B1628"/>
+                </a:solidFill>
+                <a:latin typeface="Helvetica Neue" pitchFamily="34" charset="0"/>
+                <a:ea typeface="Helvetica Neue" pitchFamily="34" charset="-122"/>
+                <a:cs typeface="Helvetica Neue" pitchFamily="34" charset="-120"/>
+              </a:rPr>
+              <a:t>Docs</a:t>
+            </a:r>
+            <a:endParaRPr lang="en-US" sz="820" dirty="0"/>
+          </a:p>
+        </p:txBody>
+      </p:sp>
+      <p:sp>
+        <p:nvSpPr>
+          <p:cNvPr id="14" name="Shape 12"/>
+          <p:cNvSpPr/>
+          <p:nvPr/>
+        </p:nvSpPr>
+        <p:spPr>
+          <a:xfrm>
+            <a:off x="9198864" y="2011680"/>
+            <a:ext cx="1133856" cy="621792"/>
+          </a:xfrm>
+          <a:prstGeom prst="roundRect">
+            <a:avLst>
+              <a:gd name="adj" fmla="val 8824"/>
+            </a:avLst>
+          </a:prstGeom>
+          <a:solidFill>
+            <a:srgbClr val="FFFFFF"/>
+          </a:solidFill>
+          <a:ln w="12700">
+            <a:solidFill>
+              <a:srgbClr val="DCE6EE"/>
+            </a:solidFill>
+            <a:prstDash val="solid"/>
+          </a:ln>
+        </p:spPr>
+      </p:sp>
+      <p:sp>
+        <p:nvSpPr>
+          <p:cNvPr id="15" name="Text 13"/>
+          <p:cNvSpPr/>
+          <p:nvPr/>
+        </p:nvSpPr>
+        <p:spPr>
+          <a:xfrm>
+            <a:off x="9272016" y="2249424"/>
+            <a:ext cx="987552" cy="91440"/>
+          </a:xfrm>
+          <a:prstGeom prst="rect">
+            <a:avLst/>
+          </a:prstGeom>
+          <a:noFill/>
+          <a:ln/>
+        </p:spPr>
+        <p:txBody>
+          <a:bodyPr wrap="square" lIns="0" tIns="0" rIns="0" bIns="0" rtlCol="0" anchor="ctr">
+            <a:normAutofit/>
+          </a:bodyPr>
+          <a:lstStyle/>
+          <a:p>
+            <a:pPr algn="ctr" indent="0" marL="0">
+              <a:buNone/>
+            </a:pPr>
+            <a:r>
+              <a:rPr lang="en-US" sz="820" b="1" dirty="0">
+                <a:solidFill>
+                  <a:srgbClr val="0B1628"/>
+                </a:solidFill>
+                <a:latin typeface="Helvetica Neue" pitchFamily="34" charset="0"/>
+                <a:ea typeface="Helvetica Neue" pitchFamily="34" charset="-122"/>
+                <a:cs typeface="Helvetica Neue" pitchFamily="34" charset="-120"/>
+              </a:rPr>
+              <a:t>Tools</a:t>
+            </a:r>
+            <a:endParaRPr lang="en-US" sz="820" dirty="0"/>
+          </a:p>
+        </p:txBody>
+      </p:sp>
+      <p:sp>
+        <p:nvSpPr>
+          <p:cNvPr id="16" name="Shape 14"/>
+          <p:cNvSpPr/>
+          <p:nvPr/>
+        </p:nvSpPr>
+        <p:spPr>
+          <a:xfrm>
+            <a:off x="6309360" y="2971800"/>
+            <a:ext cx="1133856" cy="621792"/>
+          </a:xfrm>
+          <a:prstGeom prst="roundRect">
+            <a:avLst>
+              <a:gd name="adj" fmla="val 8824"/>
+            </a:avLst>
+          </a:prstGeom>
+          <a:solidFill>
+            <a:srgbClr val="FFFFFF"/>
+          </a:solidFill>
+          <a:ln w="12700">
+            <a:solidFill>
+              <a:srgbClr val="DCE6EE"/>
+            </a:solidFill>
+            <a:prstDash val="solid"/>
+          </a:ln>
+        </p:spPr>
+      </p:sp>
+      <p:sp>
+        <p:nvSpPr>
+          <p:cNvPr id="17" name="Text 15"/>
+          <p:cNvSpPr/>
+          <p:nvPr/>
+        </p:nvSpPr>
+        <p:spPr>
+          <a:xfrm>
+            <a:off x="6382512" y="3209544"/>
+            <a:ext cx="987552" cy="91440"/>
+          </a:xfrm>
+          <a:prstGeom prst="rect">
+            <a:avLst/>
+          </a:prstGeom>
+          <a:noFill/>
+          <a:ln/>
+        </p:spPr>
+        <p:txBody>
+          <a:bodyPr wrap="square" lIns="0" tIns="0" rIns="0" bIns="0" rtlCol="0" anchor="ctr">
+            <a:normAutofit/>
+          </a:bodyPr>
+          <a:lstStyle/>
+          <a:p>
+            <a:pPr algn="ctr" indent="0" marL="0">
+              <a:buNone/>
+            </a:pPr>
+            <a:r>
+              <a:rPr lang="en-US" sz="820" b="1" dirty="0">
+                <a:solidFill>
+                  <a:srgbClr val="0B1628"/>
+                </a:solidFill>
+                <a:latin typeface="Helvetica Neue" pitchFamily="34" charset="0"/>
+                <a:ea typeface="Helvetica Neue" pitchFamily="34" charset="-122"/>
+                <a:cs typeface="Helvetica Neue" pitchFamily="34" charset="-120"/>
+              </a:rPr>
+              <a:t>Components</a:t>
+            </a:r>
+            <a:endParaRPr lang="en-US" sz="820" dirty="0"/>
+          </a:p>
+        </p:txBody>
+      </p:sp>
+      <p:sp>
+        <p:nvSpPr>
+          <p:cNvPr id="18" name="Shape 16"/>
+          <p:cNvSpPr/>
+          <p:nvPr/>
+        </p:nvSpPr>
+        <p:spPr>
+          <a:xfrm>
+            <a:off x="7754112" y="2971800"/>
+            <a:ext cx="1133856" cy="621792"/>
+          </a:xfrm>
+          <a:prstGeom prst="roundRect">
+            <a:avLst>
+              <a:gd name="adj" fmla="val 8824"/>
+            </a:avLst>
+          </a:prstGeom>
+          <a:solidFill>
+            <a:srgbClr val="FFFFFF"/>
+          </a:solidFill>
+          <a:ln w="12700">
+            <a:solidFill>
+              <a:srgbClr val="DCE6EE"/>
+            </a:solidFill>
+            <a:prstDash val="solid"/>
+          </a:ln>
+        </p:spPr>
+      </p:sp>
+      <p:sp>
+        <p:nvSpPr>
+          <p:cNvPr id="19" name="Text 17"/>
+          <p:cNvSpPr/>
+          <p:nvPr/>
+        </p:nvSpPr>
+        <p:spPr>
+          <a:xfrm>
+            <a:off x="7827264" y="3209544"/>
+            <a:ext cx="987552" cy="91440"/>
+          </a:xfrm>
+          <a:prstGeom prst="rect">
+            <a:avLst/>
+          </a:prstGeom>
+          <a:noFill/>
+          <a:ln/>
+        </p:spPr>
+        <p:txBody>
+          <a:bodyPr wrap="square" lIns="0" tIns="0" rIns="0" bIns="0" rtlCol="0" anchor="ctr">
+            <a:normAutofit/>
+          </a:bodyPr>
+          <a:lstStyle/>
+          <a:p>
+            <a:pPr algn="ctr" indent="0" marL="0">
+              <a:buNone/>
+            </a:pPr>
+            <a:r>
+              <a:rPr lang="en-US" sz="820" b="1" dirty="0">
+                <a:solidFill>
+                  <a:srgbClr val="0B1628"/>
+                </a:solidFill>
+                <a:latin typeface="Helvetica Neue" pitchFamily="34" charset="0"/>
+                <a:ea typeface="Helvetica Neue" pitchFamily="34" charset="-122"/>
+                <a:cs typeface="Helvetica Neue" pitchFamily="34" charset="-120"/>
+              </a:rPr>
+              <a:t>Skills</a:t>
+            </a:r>
+            <a:endParaRPr lang="en-US" sz="820" dirty="0"/>
+          </a:p>
+        </p:txBody>
+      </p:sp>
+      <p:sp>
+        <p:nvSpPr>
+          <p:cNvPr id="20" name="Shape 18"/>
+          <p:cNvSpPr/>
+          <p:nvPr/>
+        </p:nvSpPr>
+        <p:spPr>
+          <a:xfrm>
+            <a:off x="9198864" y="2971800"/>
+            <a:ext cx="1133856" cy="621792"/>
+          </a:xfrm>
+          <a:prstGeom prst="roundRect">
+            <a:avLst>
+              <a:gd name="adj" fmla="val 8824"/>
+            </a:avLst>
+          </a:prstGeom>
+          <a:solidFill>
+            <a:srgbClr val="FFFFFF"/>
+          </a:solidFill>
+          <a:ln w="12700">
+            <a:solidFill>
+              <a:srgbClr val="DCE6EE"/>
+            </a:solidFill>
+            <a:prstDash val="solid"/>
+          </a:ln>
+        </p:spPr>
+      </p:sp>
+      <p:sp>
+        <p:nvSpPr>
+          <p:cNvPr id="21" name="Text 19"/>
+          <p:cNvSpPr/>
+          <p:nvPr/>
+        </p:nvSpPr>
+        <p:spPr>
+          <a:xfrm>
+            <a:off x="9272016" y="3209544"/>
+            <a:ext cx="987552" cy="91440"/>
+          </a:xfrm>
+          <a:prstGeom prst="rect">
+            <a:avLst/>
+          </a:prstGeom>
+          <a:noFill/>
+          <a:ln/>
+        </p:spPr>
+        <p:txBody>
+          <a:bodyPr wrap="square" lIns="0" tIns="0" rIns="0" bIns="0" rtlCol="0" anchor="ctr">
+            <a:normAutofit/>
+          </a:bodyPr>
+          <a:lstStyle/>
+          <a:p>
+            <a:pPr algn="ctr" indent="0" marL="0">
+              <a:buNone/>
+            </a:pPr>
+            <a:r>
+              <a:rPr lang="en-US" sz="820" b="1" dirty="0">
+                <a:solidFill>
+                  <a:srgbClr val="0B1628"/>
+                </a:solidFill>
+                <a:latin typeface="Helvetica Neue" pitchFamily="34" charset="0"/>
+                <a:ea typeface="Helvetica Neue" pitchFamily="34" charset="-122"/>
+                <a:cs typeface="Helvetica Neue" pitchFamily="34" charset="-120"/>
+              </a:rPr>
+              <a:t>Themes</a:t>
+            </a:r>
+            <a:endParaRPr lang="en-US" sz="820" dirty="0"/>
+          </a:p>
+        </p:txBody>
+      </p:sp>
+      <p:sp>
+        <p:nvSpPr>
+          <p:cNvPr id="22" name="Shape 20"/>
+          <p:cNvSpPr/>
+          <p:nvPr/>
+        </p:nvSpPr>
+        <p:spPr>
+          <a:xfrm>
+            <a:off x="6309360" y="4315968"/>
+            <a:ext cx="4069080" cy="320040"/>
+          </a:xfrm>
+          <a:prstGeom prst="roundRect">
+            <a:avLst>
+              <a:gd name="adj" fmla="val 17143"/>
+            </a:avLst>
+          </a:prstGeom>
+          <a:solidFill>
+            <a:srgbClr val="EEF4F8"/>
+          </a:solidFill>
+          <a:ln w="12700">
+            <a:solidFill>
+              <a:srgbClr val="DCE6EE"/>
+            </a:solidFill>
+            <a:prstDash val="solid"/>
+          </a:ln>
+        </p:spPr>
+      </p:sp>
+      <p:sp>
+        <p:nvSpPr>
+          <p:cNvPr id="23" name="Text 21"/>
+          <p:cNvSpPr/>
+          <p:nvPr/>
+        </p:nvSpPr>
+        <p:spPr>
+          <a:xfrm>
+            <a:off x="6309360" y="4407408"/>
+            <a:ext cx="4069080" cy="109728"/>
+          </a:xfrm>
+          <a:prstGeom prst="rect">
+            <a:avLst/>
+          </a:prstGeom>
+          <a:noFill/>
+          <a:ln/>
+        </p:spPr>
+        <p:txBody>
+          <a:bodyPr wrap="square" lIns="0" tIns="0" rIns="0" bIns="0" rtlCol="0" anchor="ctr">
+            <a:normAutofit/>
+          </a:bodyPr>
+          <a:lstStyle/>
+          <a:p>
+            <a:pPr algn="ctr" indent="0" marL="0">
+              <a:buNone/>
+            </a:pPr>
+            <a:r>
+              <a:rPr lang="en-US" sz="780" b="1" dirty="0">
+                <a:solidFill>
+                  <a:srgbClr val="14B8A6"/>
+                </a:solidFill>
+                <a:latin typeface="Helvetica Neue" pitchFamily="34" charset="0"/>
+                <a:ea typeface="Helvetica Neue" pitchFamily="34" charset="-122"/>
+                <a:cs typeface="Helvetica Neue" pitchFamily="34" charset="-120"/>
+              </a:rPr>
+              <a:t>Resources can be uploaded, searched, reused and consumed by DAGs</a:t>
+            </a:r>
+            <a:endParaRPr lang="en-US" sz="780" dirty="0"/>
+          </a:p>
+        </p:txBody>
+      </p:sp>
+    </p:spTree>
+  </p:cSld>
+  <p:clrMapOvr>
+    <a:masterClrMapping/>
+  </p:clrMapOvr>
+</p:sld>
+</file>
+
+<file path=ppt/slides/slide16.xml><?xml version="1.0" encoding="utf-8"?>
+<p:sld xmlns:a="http://schemas.openxmlformats.org/drawingml/2006/main" xmlns:r="http://schemas.openxmlformats.org/officeDocument/2006/relationships" xmlns:p="http://schemas.openxmlformats.org/presentationml/2006/main">
+  <p:cSld name="Slide 16">
+    <p:bg>
+      <p:bgPr>
+        <a:solidFill>
+          <a:srgbClr val="F7FAFC"/>
+        </a:solidFill>
+      </p:bgPr>
+    </p:bg>
+    <p:spTree>
+      <p:nvGrpSpPr>
+        <p:cNvPr id="1" name=""/>
+        <p:cNvGrpSpPr/>
+        <p:nvPr/>
+      </p:nvGrpSpPr>
+      <p:grpSpPr>
+        <a:xfrm>
+          <a:off x="0" y="0"/>
+          <a:ext cx="0" cy="0"/>
+          <a:chOff x="0" y="0"/>
+          <a:chExt cx="0" cy="0"/>
+        </a:xfrm>
+      </p:grpSpPr>
+      <p:sp>
+        <p:nvSpPr>
+          <p:cNvPr id="2" name="Shape 0"/>
+          <p:cNvSpPr/>
+          <p:nvPr/>
+        </p:nvSpPr>
+        <p:spPr>
+          <a:xfrm>
+            <a:off x="585216" y="566928"/>
+            <a:ext cx="73152" cy="384048"/>
+          </a:xfrm>
+          <a:prstGeom prst="rect">
+            <a:avLst/>
+          </a:prstGeom>
+          <a:solidFill>
+            <a:srgbClr val="14B8A6"/>
+          </a:solidFill>
+          <a:ln w="12700">
+            <a:solidFill>
+              <a:srgbClr val="14B8A6"/>
+            </a:solidFill>
+            <a:prstDash val="solid"/>
+          </a:ln>
+        </p:spPr>
+      </p:sp>
+      <p:sp>
+        <p:nvSpPr>
+          <p:cNvPr id="3" name="Text 1"/>
+          <p:cNvSpPr/>
+          <p:nvPr/>
+        </p:nvSpPr>
+        <p:spPr>
+          <a:xfrm>
+            <a:off x="749808" y="621792"/>
+            <a:ext cx="310896" cy="146304"/>
+          </a:xfrm>
+          <a:prstGeom prst="rect">
+            <a:avLst/>
+          </a:prstGeom>
+          <a:noFill/>
+          <a:ln/>
+        </p:spPr>
+        <p:txBody>
+          <a:bodyPr wrap="square" lIns="0" tIns="0" rIns="0" bIns="0" rtlCol="0" anchor="ctr"/>
+          <a:lstStyle/>
+          <a:p>
+            <a:pPr indent="0" marL="0">
+              <a:buNone/>
+            </a:pPr>
+            <a:r>
+              <a:rPr lang="en-US" sz="850" b="1" dirty="0">
+                <a:solidFill>
+                  <a:srgbClr val="14B8A6"/>
+                </a:solidFill>
+                <a:latin typeface="Helvetica Neue" pitchFamily="34" charset="0"/>
+                <a:ea typeface="Helvetica Neue" pitchFamily="34" charset="-122"/>
+                <a:cs typeface="Helvetica Neue" pitchFamily="34" charset="-120"/>
+              </a:rPr>
               <a:t>14</a:t>
             </a:r>
             <a:endParaRPr lang="en-US" sz="850" dirty="0"/>
@@ -6116,9 +8037,9 @@
 </p:sld>
 </file>
 
-<file path=ppt/slides/slide16.xml><?xml version="1.0" encoding="utf-8"?>
+<file path=ppt/slides/slide17.xml><?xml version="1.0" encoding="utf-8"?>
 <p:sld xmlns:a="http://schemas.openxmlformats.org/drawingml/2006/main" xmlns:r="http://schemas.openxmlformats.org/officeDocument/2006/relationships" xmlns:p="http://schemas.openxmlformats.org/presentationml/2006/main">
-  <p:cSld name="Slide 16">
+  <p:cSld name="Slide 17">
     <p:bg>
       <p:bgPr>
         <a:solidFill>
